--- a/WorkStuff/Courses/Git/Git_General_Training_Lab/Git_General_Training_ap.ppt.pptx
+++ b/WorkStuff/Courses/Git/Git_General_Training_Lab/Git_General_Training_ap.ppt.pptx
@@ -17318,7 +17318,7 @@
         <p:spPr>
           <a:xfrm>
             <a:off x="51075" y="3995738"/>
-            <a:ext cx="3276900" cy="546000"/>
+            <a:ext cx="2533625" cy="546000"/>
           </a:xfrm>
           <a:prstGeom prst="rect">
             <a:avLst/>
@@ -17341,7 +17341,7 @@
               <a:buNone/>
             </a:pPr>
             <a:r>
-              <a:rPr lang="en-US" sz="2400"/>
+              <a:rPr lang="en-US" sz="2400" dirty="0"/>
               <a:t> Remote Repository</a:t>
             </a:r>
           </a:p>
@@ -17355,8 +17355,8 @@
         </p:nvSpPr>
         <p:spPr>
           <a:xfrm>
-            <a:off x="2811250" y="5669925"/>
-            <a:ext cx="863400" cy="509400"/>
+            <a:off x="1893825" y="5669925"/>
+            <a:ext cx="2678175" cy="509400"/>
           </a:xfrm>
           <a:prstGeom prst="rect">
             <a:avLst/>
@@ -17380,16 +17380,23 @@
           </a:bodyPr>
           <a:lstStyle/>
           <a:p>
+            <a:pPr algn="ctr"/>
+            <a:br>
+              <a:rPr lang="en-US" dirty="0"/>
+            </a:br>
+            <a:r>
+              <a:rPr lang="en-US" dirty="0"/>
+              <a:t>feat/PRJ-777</a:t>
+            </a:r>
+          </a:p>
+          <a:p>
             <a:pPr lvl="0" algn="ctr" rtl="0">
               <a:spcBef>
                 <a:spcPts val="0"/>
               </a:spcBef>
               <a:buNone/>
             </a:pPr>
-            <a:r>
-              <a:rPr lang="en-US"/>
-              <a:t>master</a:t>
-            </a:r>
+            <a:endParaRPr lang="en-US" dirty="0"/>
           </a:p>
         </p:txBody>
       </p:sp>
@@ -17397,15 +17404,16 @@
         <p:nvCxnSpPr>
           <p:cNvPr id="205" name="Shape 205"/>
           <p:cNvCxnSpPr>
+            <a:cxnSpLocks/>
             <a:stCxn id="204" idx="0"/>
             <a:endCxn id="199" idx="2"/>
           </p:cNvCxnSpPr>
           <p:nvPr/>
         </p:nvCxnSpPr>
         <p:spPr>
-          <a:xfrm rot="10800000">
-            <a:off x="3242950" y="5243025"/>
-            <a:ext cx="0" cy="426900"/>
+          <a:xfrm flipV="1">
+            <a:off x="3232913" y="5243100"/>
+            <a:ext cx="10037" cy="426825"/>
           </a:xfrm>
           <a:prstGeom prst="straightConnector1">
             <a:avLst/>
@@ -17430,8 +17438,8 @@
         </p:nvSpPr>
         <p:spPr>
           <a:xfrm>
-            <a:off x="2831350" y="3103900"/>
-            <a:ext cx="1266000" cy="546000"/>
+            <a:off x="2447025" y="3103900"/>
+            <a:ext cx="2250142" cy="546000"/>
           </a:xfrm>
           <a:prstGeom prst="rect">
             <a:avLst/>
@@ -17455,16 +17463,23 @@
           </a:bodyPr>
           <a:lstStyle/>
           <a:p>
+            <a:pPr algn="ctr"/>
+            <a:br>
+              <a:rPr lang="en-US" dirty="0"/>
+            </a:br>
+            <a:r>
+              <a:rPr lang="en-US" dirty="0"/>
+              <a:t>origin/feat/PRJ-777</a:t>
+            </a:r>
+          </a:p>
+          <a:p>
             <a:pPr lvl="0" algn="ctr" rtl="0">
               <a:spcBef>
                 <a:spcPts val="0"/>
               </a:spcBef>
               <a:buNone/>
             </a:pPr>
-            <a:r>
-              <a:rPr lang="en-US"/>
-              <a:t>origin/master</a:t>
-            </a:r>
+            <a:endParaRPr lang="en-US" dirty="0"/>
           </a:p>
         </p:txBody>
       </p:sp>
@@ -17502,8 +17517,8 @@
         </p:nvSpPr>
         <p:spPr>
           <a:xfrm>
-            <a:off x="3032650" y="1356800"/>
-            <a:ext cx="863400" cy="509400"/>
+            <a:off x="2617450" y="1356800"/>
+            <a:ext cx="1725950" cy="509400"/>
           </a:xfrm>
           <a:prstGeom prst="rect">
             <a:avLst/>
@@ -17534,8 +17549,8 @@
               <a:buNone/>
             </a:pPr>
             <a:r>
-              <a:rPr lang="en-US"/>
-              <a:t>master</a:t>
+              <a:rPr lang="en-US" dirty="0"/>
+              <a:t>feat/PRJ--777</a:t>
             </a:r>
           </a:p>
         </p:txBody>
@@ -17544,15 +17559,16 @@
         <p:nvCxnSpPr>
           <p:cNvPr id="209" name="Shape 209"/>
           <p:cNvCxnSpPr>
+            <a:cxnSpLocks/>
             <a:stCxn id="208" idx="2"/>
             <a:endCxn id="193" idx="0"/>
           </p:cNvCxnSpPr>
           <p:nvPr/>
         </p:nvCxnSpPr>
         <p:spPr>
-          <a:xfrm>
+          <a:xfrm flipH="1">
             <a:off x="3464350" y="1866200"/>
-            <a:ext cx="0" cy="455400"/>
+            <a:ext cx="16075" cy="455300"/>
           </a:xfrm>
           <a:prstGeom prst="straightConnector1">
             <a:avLst/>
@@ -17577,7 +17593,7 @@
         </p:nvSpPr>
         <p:spPr>
           <a:xfrm>
-            <a:off x="4450675" y="3074700"/>
+            <a:off x="5043900" y="3103900"/>
             <a:ext cx="3033300" cy="708600"/>
           </a:xfrm>
           <a:prstGeom prst="rect">
@@ -17601,7 +17617,7 @@
               <a:buNone/>
             </a:pPr>
             <a:r>
-              <a:rPr lang="en-US" sz="1800"/>
+              <a:rPr lang="en-US" sz="1800" dirty="0"/>
               <a:t>Remote Tracking Branch</a:t>
             </a:r>
           </a:p>
@@ -17615,7 +17631,7 @@
         </p:nvSpPr>
         <p:spPr>
           <a:xfrm>
-            <a:off x="4260200" y="1356800"/>
+            <a:off x="4697175" y="1318675"/>
             <a:ext cx="3033300" cy="708600"/>
           </a:xfrm>
           <a:prstGeom prst="rect">
@@ -17639,7 +17655,7 @@
               <a:buNone/>
             </a:pPr>
             <a:r>
-              <a:rPr lang="en-US" sz="1800"/>
+              <a:rPr lang="en-US" sz="1800" dirty="0"/>
               <a:t>Tracking Branch (Local)</a:t>
             </a:r>
           </a:p>
@@ -17699,6 +17715,7 @@
         <p:nvCxnSpPr>
           <p:cNvPr id="213" name="Shape 213"/>
           <p:cNvCxnSpPr>
+            <a:cxnSpLocks/>
             <a:endCxn id="208" idx="0"/>
           </p:cNvCxnSpPr>
           <p:nvPr/>
@@ -17706,7 +17723,7 @@
         <p:spPr>
           <a:xfrm>
             <a:off x="3464350" y="1031000"/>
-            <a:ext cx="0" cy="325800"/>
+            <a:ext cx="16075" cy="325800"/>
           </a:xfrm>
           <a:prstGeom prst="straightConnector1">
             <a:avLst/>
@@ -17788,6 +17805,194 @@
             <a:round/>
             <a:headEnd type="none" w="lg" len="lg"/>
             <a:tailEnd type="none" w="lg" len="lg"/>
+          </a:ln>
+        </p:spPr>
+      </p:cxnSp>
+      <p:sp>
+        <p:nvSpPr>
+          <p:cNvPr id="12" name="Shape 235">
+            <a:extLst>
+              <a:ext uri="{FF2B5EF4-FFF2-40B4-BE49-F238E27FC236}">
+                <a16:creationId xmlns:a16="http://schemas.microsoft.com/office/drawing/2014/main" id="{A67DD659-27BD-8D11-EF2B-B1AA044CAFEC}"/>
+              </a:ext>
+            </a:extLst>
+          </p:cNvPr>
+          <p:cNvSpPr/>
+          <p:nvPr/>
+        </p:nvSpPr>
+        <p:spPr>
+          <a:xfrm>
+            <a:off x="2638175" y="4050507"/>
+            <a:ext cx="1106200" cy="546000"/>
+          </a:xfrm>
+          <a:prstGeom prst="rect">
+            <a:avLst/>
+          </a:prstGeom>
+          <a:solidFill>
+            <a:schemeClr val="lt2"/>
+          </a:solidFill>
+          <a:ln w="19050" cap="flat" cmpd="sng">
+            <a:solidFill>
+              <a:schemeClr val="dk2"/>
+            </a:solidFill>
+            <a:prstDash val="solid"/>
+            <a:round/>
+            <a:headEnd type="none" w="med" len="med"/>
+            <a:tailEnd type="none" w="med" len="med"/>
+          </a:ln>
+        </p:spPr>
+        <p:txBody>
+          <a:bodyPr wrap="square" lIns="91425" tIns="91425" rIns="91425" bIns="91425" anchor="ctr" anchorCtr="0">
+            <a:noAutofit/>
+          </a:bodyPr>
+          <a:lstStyle/>
+          <a:p>
+            <a:pPr algn="ctr"/>
+            <a:br>
+              <a:rPr lang="en-US" dirty="0"/>
+            </a:br>
+            <a:r>
+              <a:rPr lang="en-US" dirty="0"/>
+              <a:t>master</a:t>
+            </a:r>
+          </a:p>
+          <a:p>
+            <a:pPr lvl="0" algn="ctr" rtl="0">
+              <a:spcBef>
+                <a:spcPts val="0"/>
+              </a:spcBef>
+              <a:buNone/>
+            </a:pPr>
+            <a:endParaRPr lang="en-US" dirty="0"/>
+          </a:p>
+        </p:txBody>
+      </p:sp>
+      <p:cxnSp>
+        <p:nvCxnSpPr>
+          <p:cNvPr id="13" name="Shape 248">
+            <a:extLst>
+              <a:ext uri="{FF2B5EF4-FFF2-40B4-BE49-F238E27FC236}">
+                <a16:creationId xmlns:a16="http://schemas.microsoft.com/office/drawing/2014/main" id="{9F375992-F6D7-7AEA-9E71-63E8C1503A34}"/>
+              </a:ext>
+            </a:extLst>
+          </p:cNvPr>
+          <p:cNvCxnSpPr>
+            <a:cxnSpLocks/>
+            <a:stCxn id="12" idx="2"/>
+            <a:endCxn id="199" idx="0"/>
+          </p:cNvCxnSpPr>
+          <p:nvPr/>
+        </p:nvCxnSpPr>
+        <p:spPr>
+          <a:xfrm>
+            <a:off x="3191275" y="4596507"/>
+            <a:ext cx="51675" cy="291093"/>
+          </a:xfrm>
+          <a:prstGeom prst="straightConnector1">
+            <a:avLst/>
+          </a:prstGeom>
+          <a:noFill/>
+          <a:ln w="19050" cap="flat" cmpd="sng">
+            <a:solidFill>
+              <a:schemeClr val="dk2"/>
+            </a:solidFill>
+            <a:prstDash val="solid"/>
+            <a:round/>
+            <a:headEnd type="none" w="lg" len="lg"/>
+            <a:tailEnd type="triangle" w="lg" len="lg"/>
+          </a:ln>
+        </p:spPr>
+      </p:cxnSp>
+      <p:sp>
+        <p:nvSpPr>
+          <p:cNvPr id="16" name="Shape 235">
+            <a:extLst>
+              <a:ext uri="{FF2B5EF4-FFF2-40B4-BE49-F238E27FC236}">
+                <a16:creationId xmlns:a16="http://schemas.microsoft.com/office/drawing/2014/main" id="{7BA0771D-5917-4A9F-15D3-2387FF7F6259}"/>
+              </a:ext>
+            </a:extLst>
+          </p:cNvPr>
+          <p:cNvSpPr/>
+          <p:nvPr/>
+        </p:nvSpPr>
+        <p:spPr>
+          <a:xfrm>
+            <a:off x="710600" y="3089596"/>
+            <a:ext cx="1389692" cy="509400"/>
+          </a:xfrm>
+          <a:prstGeom prst="rect">
+            <a:avLst/>
+          </a:prstGeom>
+          <a:solidFill>
+            <a:schemeClr val="lt2"/>
+          </a:solidFill>
+          <a:ln w="19050" cap="flat" cmpd="sng">
+            <a:solidFill>
+              <a:schemeClr val="dk2"/>
+            </a:solidFill>
+            <a:prstDash val="solid"/>
+            <a:round/>
+            <a:headEnd type="none" w="med" len="med"/>
+            <a:tailEnd type="none" w="med" len="med"/>
+          </a:ln>
+        </p:spPr>
+        <p:txBody>
+          <a:bodyPr wrap="square" lIns="91425" tIns="91425" rIns="91425" bIns="91425" anchor="ctr" anchorCtr="0">
+            <a:noAutofit/>
+          </a:bodyPr>
+          <a:lstStyle/>
+          <a:p>
+            <a:pPr algn="ctr"/>
+            <a:br>
+              <a:rPr lang="en-US" dirty="0"/>
+            </a:br>
+            <a:r>
+              <a:rPr lang="en-US" dirty="0"/>
+              <a:t>origin/master</a:t>
+            </a:r>
+          </a:p>
+          <a:p>
+            <a:pPr lvl="0" algn="ctr" rtl="0">
+              <a:spcBef>
+                <a:spcPts val="0"/>
+              </a:spcBef>
+              <a:buNone/>
+            </a:pPr>
+            <a:endParaRPr lang="en-US" dirty="0"/>
+          </a:p>
+        </p:txBody>
+      </p:sp>
+      <p:cxnSp>
+        <p:nvCxnSpPr>
+          <p:cNvPr id="17" name="Shape 248">
+            <a:extLst>
+              <a:ext uri="{FF2B5EF4-FFF2-40B4-BE49-F238E27FC236}">
+                <a16:creationId xmlns:a16="http://schemas.microsoft.com/office/drawing/2014/main" id="{25BC36AE-302C-116D-7BD5-AB0708097814}"/>
+              </a:ext>
+            </a:extLst>
+          </p:cNvPr>
+          <p:cNvCxnSpPr>
+            <a:cxnSpLocks/>
+          </p:cNvCxnSpPr>
+          <p:nvPr/>
+        </p:nvCxnSpPr>
+        <p:spPr>
+          <a:xfrm flipV="1">
+            <a:off x="1485200" y="2652188"/>
+            <a:ext cx="1757750" cy="435102"/>
+          </a:xfrm>
+          <a:prstGeom prst="straightConnector1">
+            <a:avLst/>
+          </a:prstGeom>
+          <a:noFill/>
+          <a:ln w="19050" cap="flat" cmpd="sng">
+            <a:solidFill>
+              <a:schemeClr val="dk2"/>
+            </a:solidFill>
+            <a:prstDash val="solid"/>
+            <a:round/>
+            <a:headEnd type="none" w="lg" len="lg"/>
+            <a:tailEnd type="triangle" w="lg" len="lg"/>
           </a:ln>
         </p:spPr>
       </p:cxnSp>
@@ -18530,7 +18735,7 @@
         <p:spPr>
           <a:xfrm>
             <a:off x="149150" y="4179438"/>
-            <a:ext cx="3276900" cy="546000"/>
+            <a:ext cx="2595268" cy="546000"/>
           </a:xfrm>
           <a:prstGeom prst="rect">
             <a:avLst/>
@@ -18553,7 +18758,7 @@
               <a:buNone/>
             </a:pPr>
             <a:r>
-              <a:rPr lang="en-US" sz="2400"/>
+              <a:rPr lang="en-US" sz="2400" dirty="0"/>
               <a:t> Remote Repository</a:t>
             </a:r>
           </a:p>
@@ -18567,8 +18772,8 @@
         </p:nvSpPr>
         <p:spPr>
           <a:xfrm>
-            <a:off x="2909325" y="5853625"/>
-            <a:ext cx="863400" cy="509400"/>
+            <a:off x="2141746" y="5853625"/>
+            <a:ext cx="2408367" cy="509400"/>
           </a:xfrm>
           <a:prstGeom prst="rect">
             <a:avLst/>
@@ -18592,16 +18797,23 @@
           </a:bodyPr>
           <a:lstStyle/>
           <a:p>
+            <a:pPr algn="ctr"/>
+            <a:br>
+              <a:rPr lang="en-US" dirty="0"/>
+            </a:br>
+            <a:r>
+              <a:rPr lang="en-US" dirty="0"/>
+              <a:t>feat/PRJ-777</a:t>
+            </a:r>
+          </a:p>
+          <a:p>
             <a:pPr lvl="0" algn="ctr" rtl="0">
               <a:spcBef>
                 <a:spcPts val="0"/>
               </a:spcBef>
               <a:buNone/>
             </a:pPr>
-            <a:r>
-              <a:rPr lang="en-US"/>
-              <a:t>master</a:t>
-            </a:r>
+            <a:endParaRPr lang="en-US" dirty="0"/>
           </a:p>
         </p:txBody>
       </p:sp>
@@ -18609,15 +18821,16 @@
         <p:nvCxnSpPr>
           <p:cNvPr id="236" name="Shape 236"/>
           <p:cNvCxnSpPr>
+            <a:cxnSpLocks/>
             <a:stCxn id="235" idx="0"/>
             <a:endCxn id="230" idx="2"/>
           </p:cNvCxnSpPr>
           <p:nvPr/>
         </p:nvCxnSpPr>
         <p:spPr>
-          <a:xfrm rot="10800000">
-            <a:off x="3341025" y="5426725"/>
-            <a:ext cx="0" cy="426900"/>
+          <a:xfrm flipH="1" flipV="1">
+            <a:off x="3341025" y="5426800"/>
+            <a:ext cx="4905" cy="426825"/>
           </a:xfrm>
           <a:prstGeom prst="straightConnector1">
             <a:avLst/>
@@ -18642,8 +18855,8 @@
         </p:nvSpPr>
         <p:spPr>
           <a:xfrm>
-            <a:off x="2831350" y="3103900"/>
-            <a:ext cx="1266000" cy="546000"/>
+            <a:off x="2141746" y="3140792"/>
+            <a:ext cx="2816100" cy="546000"/>
           </a:xfrm>
           <a:prstGeom prst="rect">
             <a:avLst/>
@@ -18674,8 +18887,8 @@
               <a:buNone/>
             </a:pPr>
             <a:r>
-              <a:rPr lang="en-US"/>
-              <a:t>origin/master</a:t>
+              <a:rPr lang="en-US" dirty="0"/>
+              <a:t>origin/feat/PRJ-777</a:t>
             </a:r>
           </a:p>
         </p:txBody>
@@ -18714,8 +18927,8 @@
         </p:nvSpPr>
         <p:spPr>
           <a:xfrm>
-            <a:off x="4138850" y="1354425"/>
-            <a:ext cx="863400" cy="509400"/>
+            <a:off x="3928599" y="1354425"/>
+            <a:ext cx="1710195" cy="509400"/>
           </a:xfrm>
           <a:prstGeom prst="rect">
             <a:avLst/>
@@ -18739,16 +18952,23 @@
           </a:bodyPr>
           <a:lstStyle/>
           <a:p>
+            <a:pPr algn="ctr"/>
+            <a:br>
+              <a:rPr lang="en-US" dirty="0"/>
+            </a:br>
+            <a:r>
+              <a:rPr lang="en-US" dirty="0"/>
+              <a:t>feat/PRJ-777</a:t>
+            </a:r>
+          </a:p>
+          <a:p>
             <a:pPr lvl="0" algn="ctr" rtl="0">
               <a:spcBef>
                 <a:spcPts val="0"/>
               </a:spcBef>
               <a:buNone/>
             </a:pPr>
-            <a:r>
-              <a:rPr lang="en-US"/>
-              <a:t>master</a:t>
-            </a:r>
+            <a:endParaRPr lang="en-US" dirty="0"/>
           </a:p>
         </p:txBody>
       </p:sp>
@@ -18760,7 +18980,7 @@
         </p:nvSpPr>
         <p:spPr>
           <a:xfrm>
-            <a:off x="0" y="2985050"/>
+            <a:off x="5842013" y="2955968"/>
             <a:ext cx="2816100" cy="708600"/>
           </a:xfrm>
           <a:prstGeom prst="rect">
@@ -18784,7 +19004,7 @@
               <a:buNone/>
             </a:pPr>
             <a:r>
-              <a:rPr lang="en-US" sz="1800"/>
+              <a:rPr lang="en-US" sz="1800" dirty="0"/>
               <a:t>Remote Tracking Branch</a:t>
             </a:r>
           </a:p>
@@ -18798,7 +19018,7 @@
         </p:nvSpPr>
         <p:spPr>
           <a:xfrm>
-            <a:off x="5371900" y="1254825"/>
+            <a:off x="5733413" y="1236383"/>
             <a:ext cx="3033300" cy="708600"/>
           </a:xfrm>
           <a:prstGeom prst="rect">
@@ -18822,7 +19042,7 @@
               <a:buNone/>
             </a:pPr>
             <a:r>
-              <a:rPr lang="en-US" sz="1800"/>
+              <a:rPr lang="en-US" sz="1800" dirty="0"/>
               <a:t>Tracking Branch (Local)</a:t>
             </a:r>
           </a:p>
@@ -18882,14 +19102,14 @@
         <p:nvCxnSpPr>
           <p:cNvPr id="243" name="Shape 243"/>
           <p:cNvCxnSpPr>
-            <a:endCxn id="239" idx="0"/>
+            <a:cxnSpLocks/>
           </p:cNvCxnSpPr>
           <p:nvPr/>
         </p:nvCxnSpPr>
         <p:spPr>
           <a:xfrm>
             <a:off x="4570550" y="1028625"/>
-            <a:ext cx="0" cy="325800"/>
+            <a:ext cx="0" cy="355500"/>
           </a:xfrm>
           <a:prstGeom prst="straightConnector1">
             <a:avLst/>
@@ -19066,15 +19286,203 @@
         <p:nvCxnSpPr>
           <p:cNvPr id="248" name="Shape 248"/>
           <p:cNvCxnSpPr>
-            <a:stCxn id="239" idx="2"/>
+            <a:cxnSpLocks/>
             <a:endCxn id="244" idx="0"/>
           </p:cNvCxnSpPr>
           <p:nvPr/>
         </p:nvCxnSpPr>
         <p:spPr>
           <a:xfrm>
-            <a:off x="4570550" y="1863825"/>
-            <a:ext cx="0" cy="457800"/>
+            <a:off x="4570550" y="1856967"/>
+            <a:ext cx="0" cy="464533"/>
+          </a:xfrm>
+          <a:prstGeom prst="straightConnector1">
+            <a:avLst/>
+          </a:prstGeom>
+          <a:noFill/>
+          <a:ln w="19050" cap="flat" cmpd="sng">
+            <a:solidFill>
+              <a:schemeClr val="dk2"/>
+            </a:solidFill>
+            <a:prstDash val="solid"/>
+            <a:round/>
+            <a:headEnd type="none" w="lg" len="lg"/>
+            <a:tailEnd type="triangle" w="lg" len="lg"/>
+          </a:ln>
+        </p:spPr>
+      </p:cxnSp>
+      <p:sp>
+        <p:nvSpPr>
+          <p:cNvPr id="12" name="Shape 235">
+            <a:extLst>
+              <a:ext uri="{FF2B5EF4-FFF2-40B4-BE49-F238E27FC236}">
+                <a16:creationId xmlns:a16="http://schemas.microsoft.com/office/drawing/2014/main" id="{F619D4D0-4678-DFBD-91C6-E2CFA022BCCF}"/>
+              </a:ext>
+            </a:extLst>
+          </p:cNvPr>
+          <p:cNvSpPr/>
+          <p:nvPr/>
+        </p:nvSpPr>
+        <p:spPr>
+          <a:xfrm>
+            <a:off x="2787925" y="4107051"/>
+            <a:ext cx="1106200" cy="509400"/>
+          </a:xfrm>
+          <a:prstGeom prst="rect">
+            <a:avLst/>
+          </a:prstGeom>
+          <a:solidFill>
+            <a:schemeClr val="lt2"/>
+          </a:solidFill>
+          <a:ln w="19050" cap="flat" cmpd="sng">
+            <a:solidFill>
+              <a:schemeClr val="dk2"/>
+            </a:solidFill>
+            <a:prstDash val="solid"/>
+            <a:round/>
+            <a:headEnd type="none" w="med" len="med"/>
+            <a:tailEnd type="none" w="med" len="med"/>
+          </a:ln>
+        </p:spPr>
+        <p:txBody>
+          <a:bodyPr wrap="square" lIns="91425" tIns="91425" rIns="91425" bIns="91425" anchor="ctr" anchorCtr="0">
+            <a:noAutofit/>
+          </a:bodyPr>
+          <a:lstStyle/>
+          <a:p>
+            <a:pPr algn="ctr"/>
+            <a:br>
+              <a:rPr lang="en-US" dirty="0"/>
+            </a:br>
+            <a:r>
+              <a:rPr lang="en-US" dirty="0"/>
+              <a:t>master</a:t>
+            </a:r>
+          </a:p>
+          <a:p>
+            <a:pPr lvl="0" algn="ctr" rtl="0">
+              <a:spcBef>
+                <a:spcPts val="0"/>
+              </a:spcBef>
+              <a:buNone/>
+            </a:pPr>
+            <a:endParaRPr lang="en-US" dirty="0"/>
+          </a:p>
+        </p:txBody>
+      </p:sp>
+      <p:cxnSp>
+        <p:nvCxnSpPr>
+          <p:cNvPr id="13" name="Shape 248">
+            <a:extLst>
+              <a:ext uri="{FF2B5EF4-FFF2-40B4-BE49-F238E27FC236}">
+                <a16:creationId xmlns:a16="http://schemas.microsoft.com/office/drawing/2014/main" id="{4BD0B368-5620-9560-8AA9-F8528F7D1782}"/>
+              </a:ext>
+            </a:extLst>
+          </p:cNvPr>
+          <p:cNvCxnSpPr>
+            <a:cxnSpLocks/>
+            <a:stCxn id="12" idx="2"/>
+            <a:endCxn id="230" idx="0"/>
+          </p:cNvCxnSpPr>
+          <p:nvPr/>
+        </p:nvCxnSpPr>
+        <p:spPr>
+          <a:xfrm>
+            <a:off x="3341025" y="4616451"/>
+            <a:ext cx="0" cy="454849"/>
+          </a:xfrm>
+          <a:prstGeom prst="straightConnector1">
+            <a:avLst/>
+          </a:prstGeom>
+          <a:noFill/>
+          <a:ln w="19050" cap="flat" cmpd="sng">
+            <a:solidFill>
+              <a:schemeClr val="dk2"/>
+            </a:solidFill>
+            <a:prstDash val="solid"/>
+            <a:round/>
+            <a:headEnd type="none" w="lg" len="lg"/>
+            <a:tailEnd type="triangle" w="lg" len="lg"/>
+          </a:ln>
+        </p:spPr>
+      </p:cxnSp>
+      <p:sp>
+        <p:nvSpPr>
+          <p:cNvPr id="17" name="Shape 235">
+            <a:extLst>
+              <a:ext uri="{FF2B5EF4-FFF2-40B4-BE49-F238E27FC236}">
+                <a16:creationId xmlns:a16="http://schemas.microsoft.com/office/drawing/2014/main" id="{53EE6FEC-3F41-FF8C-0D7C-FAFA258A6252}"/>
+              </a:ext>
+            </a:extLst>
+          </p:cNvPr>
+          <p:cNvSpPr/>
+          <p:nvPr/>
+        </p:nvSpPr>
+        <p:spPr>
+          <a:xfrm>
+            <a:off x="2545100" y="1347567"/>
+            <a:ext cx="1306550" cy="509400"/>
+          </a:xfrm>
+          <a:prstGeom prst="rect">
+            <a:avLst/>
+          </a:prstGeom>
+          <a:solidFill>
+            <a:schemeClr val="lt2"/>
+          </a:solidFill>
+          <a:ln w="19050" cap="flat" cmpd="sng">
+            <a:solidFill>
+              <a:schemeClr val="dk2"/>
+            </a:solidFill>
+            <a:prstDash val="solid"/>
+            <a:round/>
+            <a:headEnd type="none" w="med" len="med"/>
+            <a:tailEnd type="none" w="med" len="med"/>
+          </a:ln>
+        </p:spPr>
+        <p:txBody>
+          <a:bodyPr wrap="square" lIns="91425" tIns="91425" rIns="91425" bIns="91425" anchor="ctr" anchorCtr="0">
+            <a:noAutofit/>
+          </a:bodyPr>
+          <a:lstStyle/>
+          <a:p>
+            <a:pPr algn="ctr"/>
+            <a:br>
+              <a:rPr lang="en-US" dirty="0"/>
+            </a:br>
+            <a:r>
+              <a:rPr lang="en-US" dirty="0"/>
+              <a:t>origin/master</a:t>
+            </a:r>
+          </a:p>
+          <a:p>
+            <a:pPr lvl="0" algn="ctr" rtl="0">
+              <a:spcBef>
+                <a:spcPts val="0"/>
+              </a:spcBef>
+              <a:buNone/>
+            </a:pPr>
+            <a:endParaRPr lang="en-US" dirty="0"/>
+          </a:p>
+        </p:txBody>
+      </p:sp>
+      <p:cxnSp>
+        <p:nvCxnSpPr>
+          <p:cNvPr id="18" name="Shape 248">
+            <a:extLst>
+              <a:ext uri="{FF2B5EF4-FFF2-40B4-BE49-F238E27FC236}">
+                <a16:creationId xmlns:a16="http://schemas.microsoft.com/office/drawing/2014/main" id="{2143BE47-64FB-FC65-CC27-91EFE21B38A8}"/>
+              </a:ext>
+            </a:extLst>
+          </p:cNvPr>
+          <p:cNvCxnSpPr>
+            <a:cxnSpLocks/>
+          </p:cNvCxnSpPr>
+          <p:nvPr/>
+        </p:nvCxnSpPr>
+        <p:spPr>
+          <a:xfrm flipH="1">
+            <a:off x="3298550" y="1863825"/>
+            <a:ext cx="1" cy="447991"/>
           </a:xfrm>
           <a:prstGeom prst="straightConnector1">
             <a:avLst/>
@@ -19759,8 +20167,8 @@
         </p:nvSpPr>
         <p:spPr>
           <a:xfrm>
-            <a:off x="2831350" y="3103900"/>
-            <a:ext cx="1266000" cy="546000"/>
+            <a:off x="2514601" y="3103900"/>
+            <a:ext cx="2055938" cy="546000"/>
           </a:xfrm>
           <a:prstGeom prst="rect">
             <a:avLst/>
@@ -19791,8 +20199,8 @@
               <a:buNone/>
             </a:pPr>
             <a:r>
-              <a:rPr lang="en-US"/>
-              <a:t>origin/master</a:t>
+              <a:rPr lang="en-US" dirty="0"/>
+              <a:t>origin/feat/PRJ-777</a:t>
             </a:r>
           </a:p>
         </p:txBody>
@@ -19831,8 +20239,8 @@
         </p:nvSpPr>
         <p:spPr>
           <a:xfrm>
-            <a:off x="4138850" y="1354425"/>
-            <a:ext cx="863400" cy="509400"/>
+            <a:off x="3941717" y="1372787"/>
+            <a:ext cx="1255976" cy="509400"/>
           </a:xfrm>
           <a:prstGeom prst="rect">
             <a:avLst/>
@@ -19863,8 +20271,8 @@
               <a:buNone/>
             </a:pPr>
             <a:r>
-              <a:rPr lang="en-US"/>
-              <a:t>master</a:t>
+              <a:rPr lang="en-US" dirty="0"/>
+              <a:t>feat/PRJ-777</a:t>
             </a:r>
           </a:p>
         </p:txBody>
@@ -19873,6 +20281,7 @@
         <p:nvCxnSpPr>
           <p:cNvPr id="272" name="Shape 272"/>
           <p:cNvCxnSpPr>
+            <a:cxnSpLocks/>
             <a:stCxn id="271" idx="2"/>
             <a:endCxn id="273" idx="0"/>
           </p:cNvCxnSpPr>
@@ -19880,8 +20289,8 @@
         </p:nvCxnSpPr>
         <p:spPr>
           <a:xfrm>
-            <a:off x="4570550" y="1863825"/>
-            <a:ext cx="0" cy="457800"/>
+            <a:off x="4569705" y="1882187"/>
+            <a:ext cx="845" cy="439313"/>
           </a:xfrm>
           <a:prstGeom prst="straightConnector1">
             <a:avLst/>
@@ -19907,7 +20316,7 @@
         <p:spPr>
           <a:xfrm>
             <a:off x="0" y="2982075"/>
-            <a:ext cx="2742300" cy="708600"/>
+            <a:ext cx="1893825" cy="708600"/>
           </a:xfrm>
           <a:prstGeom prst="rect">
             <a:avLst/>
@@ -19930,7 +20339,7 @@
               <a:buNone/>
             </a:pPr>
             <a:r>
-              <a:rPr lang="en-US" sz="1800"/>
+              <a:rPr lang="en-US" sz="1800" dirty="0"/>
               <a:t>Remote Tracking Branch</a:t>
             </a:r>
           </a:p>
@@ -19944,7 +20353,7 @@
         </p:nvSpPr>
         <p:spPr>
           <a:xfrm>
-            <a:off x="5307650" y="1254825"/>
+            <a:off x="5795600" y="1254825"/>
             <a:ext cx="3033300" cy="708600"/>
           </a:xfrm>
           <a:prstGeom prst="rect">
@@ -19968,7 +20377,7 @@
               <a:buNone/>
             </a:pPr>
             <a:r>
-              <a:rPr lang="en-US" sz="1800"/>
+              <a:rPr lang="en-US" sz="1800" dirty="0"/>
               <a:t>Tracking Branch (Local)</a:t>
             </a:r>
           </a:p>
@@ -20028,14 +20437,16 @@
         <p:nvCxnSpPr>
           <p:cNvPr id="277" name="Shape 277"/>
           <p:cNvCxnSpPr>
+            <a:cxnSpLocks/>
+            <a:stCxn id="276" idx="2"/>
             <a:endCxn id="271" idx="0"/>
           </p:cNvCxnSpPr>
           <p:nvPr/>
         </p:nvCxnSpPr>
         <p:spPr>
-          <a:xfrm>
-            <a:off x="4570550" y="1028625"/>
-            <a:ext cx="0" cy="325800"/>
+          <a:xfrm flipH="1">
+            <a:off x="4569705" y="1081525"/>
+            <a:ext cx="845" cy="291262"/>
           </a:xfrm>
           <a:prstGeom prst="straightConnector1">
             <a:avLst/>
@@ -20241,8 +20652,8 @@
               <a:buChar char="●"/>
             </a:pPr>
             <a:r>
-              <a:rPr lang="en-US" sz="2400" b="1"/>
-              <a:t>Push another Commit to remote repository from another repository/user</a:t>
+              <a:rPr lang="en-US" sz="2400" b="1" dirty="0"/>
+              <a:t>Merge another Commit to remote repository from another feature branch</a:t>
             </a:r>
           </a:p>
         </p:txBody>
@@ -20302,6 +20713,190 @@
           </a:ln>
         </p:spPr>
       </p:cxnSp>
+      <p:sp>
+        <p:nvSpPr>
+          <p:cNvPr id="16" name="Shape 239">
+            <a:extLst>
+              <a:ext uri="{FF2B5EF4-FFF2-40B4-BE49-F238E27FC236}">
+                <a16:creationId xmlns:a16="http://schemas.microsoft.com/office/drawing/2014/main" id="{FE00801A-5E4A-45F5-FE23-B67D41036E41}"/>
+              </a:ext>
+            </a:extLst>
+          </p:cNvPr>
+          <p:cNvSpPr/>
+          <p:nvPr/>
+        </p:nvSpPr>
+        <p:spPr>
+          <a:xfrm>
+            <a:off x="2492998" y="1362875"/>
+            <a:ext cx="1255976" cy="509400"/>
+          </a:xfrm>
+          <a:prstGeom prst="rect">
+            <a:avLst/>
+          </a:prstGeom>
+          <a:solidFill>
+            <a:schemeClr val="lt2"/>
+          </a:solidFill>
+          <a:ln w="19050" cap="flat" cmpd="sng">
+            <a:solidFill>
+              <a:schemeClr val="dk2"/>
+            </a:solidFill>
+            <a:prstDash val="solid"/>
+            <a:round/>
+            <a:headEnd type="none" w="med" len="med"/>
+            <a:tailEnd type="none" w="med" len="med"/>
+          </a:ln>
+        </p:spPr>
+        <p:txBody>
+          <a:bodyPr wrap="square" lIns="91425" tIns="91425" rIns="91425" bIns="91425" anchor="ctr" anchorCtr="0">
+            <a:noAutofit/>
+          </a:bodyPr>
+          <a:lstStyle/>
+          <a:p>
+            <a:pPr algn="ctr"/>
+            <a:br>
+              <a:rPr lang="en-US" dirty="0"/>
+            </a:br>
+            <a:r>
+              <a:rPr lang="en-US" dirty="0" err="1"/>
+              <a:t>orig</a:t>
+            </a:r>
+            <a:r>
+              <a:rPr lang="en-US" dirty="0"/>
+              <a:t>/master</a:t>
+            </a:r>
+          </a:p>
+          <a:p>
+            <a:pPr lvl="0" algn="ctr" rtl="0">
+              <a:spcBef>
+                <a:spcPts val="0"/>
+              </a:spcBef>
+              <a:buNone/>
+            </a:pPr>
+            <a:endParaRPr lang="en-US" dirty="0"/>
+          </a:p>
+        </p:txBody>
+      </p:sp>
+      <p:cxnSp>
+        <p:nvCxnSpPr>
+          <p:cNvPr id="17" name="Shape 272">
+            <a:extLst>
+              <a:ext uri="{FF2B5EF4-FFF2-40B4-BE49-F238E27FC236}">
+                <a16:creationId xmlns:a16="http://schemas.microsoft.com/office/drawing/2014/main" id="{F2F32417-F181-1D16-E9AD-474EA551647B}"/>
+              </a:ext>
+            </a:extLst>
+          </p:cNvPr>
+          <p:cNvCxnSpPr>
+            <a:cxnSpLocks/>
+            <a:endCxn id="257" idx="0"/>
+          </p:cNvCxnSpPr>
+          <p:nvPr/>
+        </p:nvCxnSpPr>
+        <p:spPr>
+          <a:xfrm>
+            <a:off x="3464349" y="1921984"/>
+            <a:ext cx="1" cy="399516"/>
+          </a:xfrm>
+          <a:prstGeom prst="straightConnector1">
+            <a:avLst/>
+          </a:prstGeom>
+          <a:noFill/>
+          <a:ln w="19050" cap="flat" cmpd="sng">
+            <a:solidFill>
+              <a:schemeClr val="dk2"/>
+            </a:solidFill>
+            <a:prstDash val="solid"/>
+            <a:round/>
+            <a:headEnd type="none" w="lg" len="lg"/>
+            <a:tailEnd type="triangle" w="lg" len="lg"/>
+          </a:ln>
+        </p:spPr>
+      </p:cxnSp>
+      <p:cxnSp>
+        <p:nvCxnSpPr>
+          <p:cNvPr id="21" name="Shape 272">
+            <a:extLst>
+              <a:ext uri="{FF2B5EF4-FFF2-40B4-BE49-F238E27FC236}">
+                <a16:creationId xmlns:a16="http://schemas.microsoft.com/office/drawing/2014/main" id="{203D1E95-9B5A-D19C-C897-62955FE718BD}"/>
+              </a:ext>
+            </a:extLst>
+          </p:cNvPr>
+          <p:cNvCxnSpPr>
+            <a:cxnSpLocks/>
+          </p:cNvCxnSpPr>
+          <p:nvPr/>
+        </p:nvCxnSpPr>
+        <p:spPr>
+          <a:xfrm>
+            <a:off x="3187208" y="5378387"/>
+            <a:ext cx="845" cy="439313"/>
+          </a:xfrm>
+          <a:prstGeom prst="straightConnector1">
+            <a:avLst/>
+          </a:prstGeom>
+          <a:noFill/>
+          <a:ln w="19050" cap="flat" cmpd="sng">
+            <a:solidFill>
+              <a:schemeClr val="dk2"/>
+            </a:solidFill>
+            <a:prstDash val="solid"/>
+            <a:round/>
+            <a:headEnd type="none" w="lg" len="lg"/>
+            <a:tailEnd type="triangle" w="lg" len="lg"/>
+          </a:ln>
+        </p:spPr>
+      </p:cxnSp>
+      <p:sp>
+        <p:nvSpPr>
+          <p:cNvPr id="24" name="Shape 269">
+            <a:extLst>
+              <a:ext uri="{FF2B5EF4-FFF2-40B4-BE49-F238E27FC236}">
+                <a16:creationId xmlns:a16="http://schemas.microsoft.com/office/drawing/2014/main" id="{8E228DF1-D7D6-5D9F-FB80-2532A8B4916D}"/>
+              </a:ext>
+            </a:extLst>
+          </p:cNvPr>
+          <p:cNvSpPr/>
+          <p:nvPr/>
+        </p:nvSpPr>
+        <p:spPr>
+          <a:xfrm>
+            <a:off x="1788575" y="5809250"/>
+            <a:ext cx="2055938" cy="546000"/>
+          </a:xfrm>
+          <a:prstGeom prst="rect">
+            <a:avLst/>
+          </a:prstGeom>
+          <a:solidFill>
+            <a:schemeClr val="lt2"/>
+          </a:solidFill>
+          <a:ln w="19050" cap="flat" cmpd="sng">
+            <a:solidFill>
+              <a:schemeClr val="dk2"/>
+            </a:solidFill>
+            <a:prstDash val="solid"/>
+            <a:round/>
+            <a:headEnd type="none" w="med" len="med"/>
+            <a:tailEnd type="none" w="med" len="med"/>
+          </a:ln>
+        </p:spPr>
+        <p:txBody>
+          <a:bodyPr wrap="square" lIns="91425" tIns="91425" rIns="91425" bIns="91425" anchor="ctr" anchorCtr="0">
+            <a:noAutofit/>
+          </a:bodyPr>
+          <a:lstStyle/>
+          <a:p>
+            <a:pPr lvl="0" algn="ctr" rtl="0">
+              <a:spcBef>
+                <a:spcPts val="0"/>
+              </a:spcBef>
+              <a:buNone/>
+            </a:pPr>
+            <a:r>
+              <a:rPr lang="en-US" dirty="0"/>
+              <a:t>feat/PRJ-777</a:t>
+            </a:r>
+          </a:p>
+        </p:txBody>
+      </p:sp>
     </p:spTree>
   </p:cSld>
   <p:clrMapOvr>
@@ -21071,8 +21666,8 @@
         </p:nvSpPr>
         <p:spPr>
           <a:xfrm>
-            <a:off x="4138850" y="1354425"/>
-            <a:ext cx="863400" cy="509400"/>
+            <a:off x="3851650" y="1354425"/>
+            <a:ext cx="1482350" cy="509400"/>
           </a:xfrm>
           <a:prstGeom prst="rect">
             <a:avLst/>
@@ -21103,8 +21698,8 @@
               <a:buNone/>
             </a:pPr>
             <a:r>
-              <a:rPr lang="en-US"/>
-              <a:t>master</a:t>
+              <a:rPr lang="en-US" dirty="0"/>
+              <a:t>feat/PRJ-777</a:t>
             </a:r>
           </a:p>
         </p:txBody>
@@ -21113,15 +21708,16 @@
         <p:nvCxnSpPr>
           <p:cNvPr id="309" name="Shape 309"/>
           <p:cNvCxnSpPr>
+            <a:cxnSpLocks/>
             <a:stCxn id="308" idx="2"/>
             <a:endCxn id="310" idx="0"/>
           </p:cNvCxnSpPr>
           <p:nvPr/>
         </p:nvCxnSpPr>
         <p:spPr>
-          <a:xfrm>
+          <a:xfrm flipH="1">
             <a:off x="4570550" y="1863825"/>
-            <a:ext cx="0" cy="457800"/>
+            <a:ext cx="22275" cy="457675"/>
           </a:xfrm>
           <a:prstGeom prst="straightConnector1">
             <a:avLst/>
@@ -21146,7 +21742,7 @@
         </p:nvSpPr>
         <p:spPr>
           <a:xfrm>
-            <a:off x="1893825" y="3781875"/>
+            <a:off x="1826993" y="3731151"/>
             <a:ext cx="2796900" cy="708600"/>
           </a:xfrm>
           <a:prstGeom prst="rect">
@@ -21170,7 +21766,7 @@
               <a:buNone/>
             </a:pPr>
             <a:r>
-              <a:rPr lang="en-US" sz="1800"/>
+              <a:rPr lang="en-US" sz="1800" dirty="0"/>
               <a:t>Remote Tracking Branch</a:t>
             </a:r>
           </a:p>
@@ -21184,7 +21780,7 @@
         </p:nvSpPr>
         <p:spPr>
           <a:xfrm>
-            <a:off x="5205800" y="1254825"/>
+            <a:off x="5753100" y="1254825"/>
             <a:ext cx="3033300" cy="708600"/>
           </a:xfrm>
           <a:prstGeom prst="rect">
@@ -21208,7 +21804,7 @@
               <a:buNone/>
             </a:pPr>
             <a:r>
-              <a:rPr lang="en-US" sz="1800"/>
+              <a:rPr lang="en-US" sz="1800" dirty="0"/>
               <a:t>Tracking Branch (Local)</a:t>
             </a:r>
           </a:p>
@@ -21268,6 +21864,7 @@
         <p:nvCxnSpPr>
           <p:cNvPr id="314" name="Shape 314"/>
           <p:cNvCxnSpPr>
+            <a:cxnSpLocks/>
             <a:endCxn id="308" idx="0"/>
           </p:cNvCxnSpPr>
           <p:nvPr/>
@@ -21275,7 +21872,7 @@
         <p:spPr>
           <a:xfrm>
             <a:off x="4570550" y="1028625"/>
-            <a:ext cx="0" cy="325800"/>
+            <a:ext cx="22275" cy="325800"/>
           </a:xfrm>
           <a:prstGeom prst="straightConnector1">
             <a:avLst/>
@@ -21634,6 +22231,174 @@
             <a:round/>
             <a:headEnd type="none" w="lg" len="lg"/>
             <a:tailEnd type="none" w="lg" len="lg"/>
+          </a:ln>
+        </p:spPr>
+      </p:cxnSp>
+      <p:sp>
+        <p:nvSpPr>
+          <p:cNvPr id="10" name="Shape 269">
+            <a:extLst>
+              <a:ext uri="{FF2B5EF4-FFF2-40B4-BE49-F238E27FC236}">
+                <a16:creationId xmlns:a16="http://schemas.microsoft.com/office/drawing/2014/main" id="{B034F0C2-27BA-9B89-3754-A3FD53C727BB}"/>
+              </a:ext>
+            </a:extLst>
+          </p:cNvPr>
+          <p:cNvSpPr/>
+          <p:nvPr/>
+        </p:nvSpPr>
+        <p:spPr>
+          <a:xfrm>
+            <a:off x="1826993" y="6164967"/>
+            <a:ext cx="2055938" cy="546000"/>
+          </a:xfrm>
+          <a:prstGeom prst="rect">
+            <a:avLst/>
+          </a:prstGeom>
+          <a:solidFill>
+            <a:schemeClr val="lt2"/>
+          </a:solidFill>
+          <a:ln w="19050" cap="flat" cmpd="sng">
+            <a:solidFill>
+              <a:schemeClr val="dk2"/>
+            </a:solidFill>
+            <a:prstDash val="solid"/>
+            <a:round/>
+            <a:headEnd type="none" w="med" len="med"/>
+            <a:tailEnd type="none" w="med" len="med"/>
+          </a:ln>
+        </p:spPr>
+        <p:txBody>
+          <a:bodyPr wrap="square" lIns="91425" tIns="91425" rIns="91425" bIns="91425" anchor="ctr" anchorCtr="0">
+            <a:noAutofit/>
+          </a:bodyPr>
+          <a:lstStyle/>
+          <a:p>
+            <a:pPr lvl="0" algn="ctr" rtl="0">
+              <a:spcBef>
+                <a:spcPts val="0"/>
+              </a:spcBef>
+              <a:buNone/>
+            </a:pPr>
+            <a:r>
+              <a:rPr lang="en-US" dirty="0"/>
+              <a:t>feat/PRJ-777</a:t>
+            </a:r>
+          </a:p>
+        </p:txBody>
+      </p:sp>
+      <p:sp>
+        <p:nvSpPr>
+          <p:cNvPr id="11" name="Shape 269">
+            <a:extLst>
+              <a:ext uri="{FF2B5EF4-FFF2-40B4-BE49-F238E27FC236}">
+                <a16:creationId xmlns:a16="http://schemas.microsoft.com/office/drawing/2014/main" id="{E4695B24-9243-1647-67C8-AE19325B91FE}"/>
+              </a:ext>
+            </a:extLst>
+          </p:cNvPr>
+          <p:cNvSpPr/>
+          <p:nvPr/>
+        </p:nvSpPr>
+        <p:spPr>
+          <a:xfrm>
+            <a:off x="2194680" y="3100676"/>
+            <a:ext cx="2055938" cy="546000"/>
+          </a:xfrm>
+          <a:prstGeom prst="rect">
+            <a:avLst/>
+          </a:prstGeom>
+          <a:solidFill>
+            <a:schemeClr val="lt2"/>
+          </a:solidFill>
+          <a:ln w="19050" cap="flat" cmpd="sng">
+            <a:solidFill>
+              <a:schemeClr val="dk2"/>
+            </a:solidFill>
+            <a:prstDash val="solid"/>
+            <a:round/>
+            <a:headEnd type="none" w="med" len="med"/>
+            <a:tailEnd type="none" w="med" len="med"/>
+          </a:ln>
+        </p:spPr>
+        <p:txBody>
+          <a:bodyPr wrap="square" lIns="91425" tIns="91425" rIns="91425" bIns="91425" anchor="ctr" anchorCtr="0">
+            <a:noAutofit/>
+          </a:bodyPr>
+          <a:lstStyle/>
+          <a:p>
+            <a:pPr lvl="0" algn="ctr" rtl="0">
+              <a:spcBef>
+                <a:spcPts val="0"/>
+              </a:spcBef>
+              <a:buNone/>
+            </a:pPr>
+            <a:r>
+              <a:rPr lang="en-US" dirty="0"/>
+              <a:t>feat/PRJ-777</a:t>
+            </a:r>
+          </a:p>
+        </p:txBody>
+      </p:sp>
+      <p:cxnSp>
+        <p:nvCxnSpPr>
+          <p:cNvPr id="12" name="Shape 304">
+            <a:extLst>
+              <a:ext uri="{FF2B5EF4-FFF2-40B4-BE49-F238E27FC236}">
+                <a16:creationId xmlns:a16="http://schemas.microsoft.com/office/drawing/2014/main" id="{DAB89635-5CB3-2A45-5913-C2D3E95A5239}"/>
+              </a:ext>
+            </a:extLst>
+          </p:cNvPr>
+          <p:cNvCxnSpPr/>
+          <p:nvPr/>
+        </p:nvCxnSpPr>
+        <p:spPr>
+          <a:xfrm rot="10800000">
+            <a:off x="3184316" y="5738067"/>
+            <a:ext cx="0" cy="426900"/>
+          </a:xfrm>
+          <a:prstGeom prst="straightConnector1">
+            <a:avLst/>
+          </a:prstGeom>
+          <a:noFill/>
+          <a:ln w="19050" cap="flat" cmpd="sng">
+            <a:solidFill>
+              <a:schemeClr val="dk2"/>
+            </a:solidFill>
+            <a:prstDash val="solid"/>
+            <a:round/>
+            <a:headEnd type="none" w="lg" len="lg"/>
+            <a:tailEnd type="triangle" w="lg" len="lg"/>
+          </a:ln>
+        </p:spPr>
+      </p:cxnSp>
+      <p:cxnSp>
+        <p:nvCxnSpPr>
+          <p:cNvPr id="13" name="Shape 304">
+            <a:extLst>
+              <a:ext uri="{FF2B5EF4-FFF2-40B4-BE49-F238E27FC236}">
+                <a16:creationId xmlns:a16="http://schemas.microsoft.com/office/drawing/2014/main" id="{5F4D6748-CFD8-6B3B-810D-5513DFA3C495}"/>
+              </a:ext>
+            </a:extLst>
+          </p:cNvPr>
+          <p:cNvCxnSpPr/>
+          <p:nvPr/>
+        </p:nvCxnSpPr>
+        <p:spPr>
+          <a:xfrm rot="10800000">
+            <a:off x="3425550" y="2673776"/>
+            <a:ext cx="0" cy="426900"/>
+          </a:xfrm>
+          <a:prstGeom prst="straightConnector1">
+            <a:avLst/>
+          </a:prstGeom>
+          <a:noFill/>
+          <a:ln w="19050" cap="flat" cmpd="sng">
+            <a:solidFill>
+              <a:schemeClr val="dk2"/>
+            </a:solidFill>
+            <a:prstDash val="solid"/>
+            <a:round/>
+            <a:headEnd type="none" w="lg" len="lg"/>
+            <a:tailEnd type="triangle" w="lg" len="lg"/>
           </a:ln>
         </p:spPr>
       </p:cxnSp>
@@ -21950,7 +22715,7 @@
               <a:buNone/>
             </a:pPr>
             <a:r>
-              <a:rPr lang="en-US" sz="3400" b="0" i="0" u="none" strike="noStrike" cap="none">
+              <a:rPr lang="en-US" sz="3400" b="0" i="0" u="none" strike="noStrike" cap="none" dirty="0">
                 <a:solidFill>
                   <a:schemeClr val="dk2"/>
                 </a:solidFill>
@@ -21959,17 +22724,14 @@
                 <a:cs typeface="Merriweather"/>
                 <a:sym typeface="Merriweather"/>
               </a:rPr>
-              <a:t>Rebasing </a:t>
-            </a:r>
-            <a:r>
-              <a:rPr lang="en-US">
-                <a:latin typeface="Merriweather"/>
-                <a:ea typeface="Merriweather"/>
-                <a:cs typeface="Merriweather"/>
-                <a:sym typeface="Merriweather"/>
-              </a:rPr>
-              <a:t>Remote Tracking Branch</a:t>
-            </a:r>
+              <a:t>Rebasing origin/master</a:t>
+            </a:r>
+            <a:endParaRPr lang="en-US" dirty="0">
+              <a:latin typeface="Merriweather"/>
+              <a:ea typeface="Merriweather"/>
+              <a:cs typeface="Merriweather"/>
+              <a:sym typeface="Merriweather"/>
+            </a:endParaRPr>
           </a:p>
         </p:txBody>
       </p:sp>
@@ -22406,8 +23168,8 @@
         </p:nvSpPr>
         <p:spPr>
           <a:xfrm>
-            <a:off x="5161400" y="1557675"/>
-            <a:ext cx="863400" cy="509400"/>
+            <a:off x="4862800" y="1557675"/>
+            <a:ext cx="1461800" cy="509400"/>
           </a:xfrm>
           <a:prstGeom prst="rect">
             <a:avLst/>
@@ -22438,8 +23200,8 @@
               <a:buNone/>
             </a:pPr>
             <a:r>
-              <a:rPr lang="en-US"/>
-              <a:t>master</a:t>
+              <a:rPr lang="en-US" dirty="0"/>
+              <a:t>feat/PRJ-777</a:t>
             </a:r>
           </a:p>
         </p:txBody>
@@ -22448,15 +23210,16 @@
         <p:nvCxnSpPr>
           <p:cNvPr id="347" name="Shape 347"/>
           <p:cNvCxnSpPr>
+            <a:cxnSpLocks/>
             <a:stCxn id="346" idx="2"/>
             <a:endCxn id="348" idx="0"/>
           </p:cNvCxnSpPr>
           <p:nvPr/>
         </p:nvCxnSpPr>
         <p:spPr>
-          <a:xfrm>
+          <a:xfrm flipH="1">
             <a:off x="5593100" y="2067075"/>
-            <a:ext cx="0" cy="959400"/>
+            <a:ext cx="600" cy="959325"/>
           </a:xfrm>
           <a:prstGeom prst="straightConnector1">
             <a:avLst/>
@@ -22481,7 +23244,7 @@
         </p:nvSpPr>
         <p:spPr>
           <a:xfrm>
-            <a:off x="2065900" y="3729200"/>
+            <a:off x="2000525" y="4001149"/>
             <a:ext cx="2796900" cy="708600"/>
           </a:xfrm>
           <a:prstGeom prst="rect">
@@ -22505,7 +23268,7 @@
               <a:buNone/>
             </a:pPr>
             <a:r>
-              <a:rPr lang="en-US" sz="1800"/>
+              <a:rPr lang="en-US" sz="1800" dirty="0"/>
               <a:t>Remote Tracking Branch</a:t>
             </a:r>
           </a:p>
@@ -22519,8 +23282,8 @@
         </p:nvSpPr>
         <p:spPr>
           <a:xfrm>
-            <a:off x="6226100" y="1458075"/>
-            <a:ext cx="3033300" cy="708600"/>
+            <a:off x="6502050" y="1286667"/>
+            <a:ext cx="2013250" cy="708600"/>
           </a:xfrm>
           <a:prstGeom prst="rect">
             <a:avLst/>
@@ -22543,7 +23306,7 @@
               <a:buNone/>
             </a:pPr>
             <a:r>
-              <a:rPr lang="en-US" sz="1800"/>
+              <a:rPr lang="en-US" sz="1800" dirty="0"/>
               <a:t>Tracking Branch (Local)</a:t>
             </a:r>
           </a:p>
@@ -22603,6 +23366,7 @@
         <p:nvCxnSpPr>
           <p:cNvPr id="352" name="Shape 352"/>
           <p:cNvCxnSpPr>
+            <a:cxnSpLocks/>
             <a:endCxn id="346" idx="0"/>
           </p:cNvCxnSpPr>
           <p:nvPr/>
@@ -22610,7 +23374,7 @@
         <p:spPr>
           <a:xfrm>
             <a:off x="5593100" y="1231875"/>
-            <a:ext cx="0" cy="325800"/>
+            <a:ext cx="600" cy="325800"/>
           </a:xfrm>
           <a:prstGeom prst="straightConnector1">
             <a:avLst/>
@@ -22824,7 +23588,7 @@
               <a:buChar char="●"/>
             </a:pPr>
             <a:r>
-              <a:rPr lang="en-US" sz="1800">
+              <a:rPr lang="en-US" sz="1800" dirty="0">
                 <a:solidFill>
                   <a:srgbClr val="333333"/>
                 </a:solidFill>
@@ -22832,10 +23596,10 @@
                   <a:srgbClr val="FFFFFF"/>
                 </a:highlight>
               </a:rPr>
-              <a:t>$ git rebase</a:t>
+              <a:t>$ git rebase origin/master</a:t>
             </a:r>
             <a:br>
-              <a:rPr lang="en-US" sz="1800">
+              <a:rPr lang="en-US" sz="1800" dirty="0">
                 <a:solidFill>
                   <a:srgbClr val="333333"/>
                 </a:solidFill>
@@ -22845,7 +23609,7 @@
               </a:rPr>
             </a:br>
             <a:r>
-              <a:rPr lang="en-US" sz="2400">
+              <a:rPr lang="en-US" sz="2400" dirty="0">
                 <a:solidFill>
                   <a:srgbClr val="333333"/>
                 </a:solidFill>
@@ -22863,7 +23627,7 @@
               </a:spcBef>
               <a:buNone/>
             </a:pPr>
-            <a:endParaRPr sz="2400" b="1"/>
+            <a:endParaRPr sz="2400" b="1" dirty="0"/>
           </a:p>
         </p:txBody>
       </p:sp>
@@ -23005,6 +23769,176 @@
           </a:p>
         </p:txBody>
       </p:sp>
+      <p:sp>
+        <p:nvSpPr>
+          <p:cNvPr id="6" name="Shape 269">
+            <a:extLst>
+              <a:ext uri="{FF2B5EF4-FFF2-40B4-BE49-F238E27FC236}">
+                <a16:creationId xmlns:a16="http://schemas.microsoft.com/office/drawing/2014/main" id="{E9820D03-692E-C87D-F049-DFF45A95611E}"/>
+              </a:ext>
+            </a:extLst>
+          </p:cNvPr>
+          <p:cNvSpPr/>
+          <p:nvPr/>
+        </p:nvSpPr>
+        <p:spPr>
+          <a:xfrm>
+            <a:off x="2418609" y="3114954"/>
+            <a:ext cx="2055938" cy="546000"/>
+          </a:xfrm>
+          <a:prstGeom prst="rect">
+            <a:avLst/>
+          </a:prstGeom>
+          <a:solidFill>
+            <a:schemeClr val="lt2"/>
+          </a:solidFill>
+          <a:ln w="19050" cap="flat" cmpd="sng">
+            <a:solidFill>
+              <a:schemeClr val="dk2"/>
+            </a:solidFill>
+            <a:prstDash val="solid"/>
+            <a:round/>
+            <a:headEnd type="none" w="med" len="med"/>
+            <a:tailEnd type="none" w="med" len="med"/>
+          </a:ln>
+        </p:spPr>
+        <p:txBody>
+          <a:bodyPr wrap="square" lIns="91425" tIns="91425" rIns="91425" bIns="91425" anchor="ctr" anchorCtr="0">
+            <a:noAutofit/>
+          </a:bodyPr>
+          <a:lstStyle/>
+          <a:p>
+            <a:pPr lvl="0" algn="ctr" rtl="0">
+              <a:spcBef>
+                <a:spcPts val="0"/>
+              </a:spcBef>
+              <a:buNone/>
+            </a:pPr>
+            <a:r>
+              <a:rPr lang="en-US" dirty="0"/>
+              <a:t>origin/feat/PRJ-777</a:t>
+            </a:r>
+          </a:p>
+        </p:txBody>
+      </p:sp>
+      <p:cxnSp>
+        <p:nvCxnSpPr>
+          <p:cNvPr id="7" name="Shape 345">
+            <a:extLst>
+              <a:ext uri="{FF2B5EF4-FFF2-40B4-BE49-F238E27FC236}">
+                <a16:creationId xmlns:a16="http://schemas.microsoft.com/office/drawing/2014/main" id="{48C3A37E-0984-04ED-1C9D-D5173E0052DA}"/>
+              </a:ext>
+            </a:extLst>
+          </p:cNvPr>
+          <p:cNvCxnSpPr/>
+          <p:nvPr/>
+        </p:nvCxnSpPr>
+        <p:spPr>
+          <a:xfrm rot="10800000">
+            <a:off x="3452467" y="2677000"/>
+            <a:ext cx="0" cy="426900"/>
+          </a:xfrm>
+          <a:prstGeom prst="straightConnector1">
+            <a:avLst/>
+          </a:prstGeom>
+          <a:noFill/>
+          <a:ln w="19050" cap="flat" cmpd="sng">
+            <a:solidFill>
+              <a:schemeClr val="dk2"/>
+            </a:solidFill>
+            <a:prstDash val="solid"/>
+            <a:round/>
+            <a:headEnd type="none" w="lg" len="lg"/>
+            <a:tailEnd type="triangle" w="lg" len="lg"/>
+          </a:ln>
+        </p:spPr>
+      </p:cxnSp>
+      <p:sp>
+        <p:nvSpPr>
+          <p:cNvPr id="8" name="Shape 269">
+            <a:extLst>
+              <a:ext uri="{FF2B5EF4-FFF2-40B4-BE49-F238E27FC236}">
+                <a16:creationId xmlns:a16="http://schemas.microsoft.com/office/drawing/2014/main" id="{0A894F88-E942-D7CF-F866-C84C554048BC}"/>
+              </a:ext>
+            </a:extLst>
+          </p:cNvPr>
+          <p:cNvSpPr/>
+          <p:nvPr/>
+        </p:nvSpPr>
+        <p:spPr>
+          <a:xfrm>
+            <a:off x="1811631" y="6151434"/>
+            <a:ext cx="2055938" cy="546000"/>
+          </a:xfrm>
+          <a:prstGeom prst="rect">
+            <a:avLst/>
+          </a:prstGeom>
+          <a:solidFill>
+            <a:schemeClr val="lt2"/>
+          </a:solidFill>
+          <a:ln w="19050" cap="flat" cmpd="sng">
+            <a:solidFill>
+              <a:schemeClr val="dk2"/>
+            </a:solidFill>
+            <a:prstDash val="solid"/>
+            <a:round/>
+            <a:headEnd type="none" w="med" len="med"/>
+            <a:tailEnd type="none" w="med" len="med"/>
+          </a:ln>
+        </p:spPr>
+        <p:txBody>
+          <a:bodyPr wrap="square" lIns="91425" tIns="91425" rIns="91425" bIns="91425" anchor="ctr" anchorCtr="0">
+            <a:noAutofit/>
+          </a:bodyPr>
+          <a:lstStyle/>
+          <a:p>
+            <a:pPr lvl="0" algn="ctr" rtl="0">
+              <a:spcBef>
+                <a:spcPts val="0"/>
+              </a:spcBef>
+              <a:buNone/>
+            </a:pPr>
+            <a:r>
+              <a:rPr lang="en-US" dirty="0"/>
+              <a:t>feat/PRJ-777</a:t>
+            </a:r>
+          </a:p>
+        </p:txBody>
+      </p:sp>
+      <p:cxnSp>
+        <p:nvCxnSpPr>
+          <p:cNvPr id="9" name="Shape 342">
+            <a:extLst>
+              <a:ext uri="{FF2B5EF4-FFF2-40B4-BE49-F238E27FC236}">
+                <a16:creationId xmlns:a16="http://schemas.microsoft.com/office/drawing/2014/main" id="{2FDB4CF3-60E7-7B12-0172-9779E049F986}"/>
+              </a:ext>
+            </a:extLst>
+          </p:cNvPr>
+          <p:cNvCxnSpPr>
+            <a:cxnSpLocks/>
+          </p:cNvCxnSpPr>
+          <p:nvPr/>
+        </p:nvCxnSpPr>
+        <p:spPr>
+          <a:xfrm flipV="1">
+            <a:off x="3135308" y="5845500"/>
+            <a:ext cx="0" cy="319467"/>
+          </a:xfrm>
+          <a:prstGeom prst="straightConnector1">
+            <a:avLst/>
+          </a:prstGeom>
+          <a:noFill/>
+          <a:ln w="19050" cap="flat" cmpd="sng">
+            <a:solidFill>
+              <a:schemeClr val="dk2"/>
+            </a:solidFill>
+            <a:prstDash val="solid"/>
+            <a:round/>
+            <a:headEnd type="none" w="lg" len="lg"/>
+            <a:tailEnd type="triangle" w="lg" len="lg"/>
+          </a:ln>
+        </p:spPr>
+      </p:cxnSp>
     </p:spTree>
   </p:cSld>
   <p:clrMapOvr>
@@ -23777,8 +24711,8 @@
         </p:nvSpPr>
         <p:spPr>
           <a:xfrm>
-            <a:off x="6343375" y="1478513"/>
-            <a:ext cx="863400" cy="509400"/>
+            <a:off x="6060183" y="1443697"/>
+            <a:ext cx="1227725" cy="509400"/>
           </a:xfrm>
           <a:prstGeom prst="rect">
             <a:avLst/>
@@ -23809,8 +24743,8 @@
               <a:buNone/>
             </a:pPr>
             <a:r>
-              <a:rPr lang="en-US"/>
-              <a:t>master</a:t>
+              <a:rPr lang="en-US" dirty="0"/>
+              <a:t>feat/PRJ-777</a:t>
             </a:r>
           </a:p>
         </p:txBody>
@@ -23819,15 +24753,15 @@
         <p:nvCxnSpPr>
           <p:cNvPr id="386" name="Shape 386"/>
           <p:cNvCxnSpPr>
-            <a:stCxn id="385" idx="2"/>
+            <a:cxnSpLocks/>
             <a:endCxn id="387" idx="0"/>
           </p:cNvCxnSpPr>
           <p:nvPr/>
         </p:nvCxnSpPr>
         <p:spPr>
           <a:xfrm>
-            <a:off x="6775075" y="1987913"/>
-            <a:ext cx="0" cy="304200"/>
+            <a:off x="6775075" y="1919613"/>
+            <a:ext cx="0" cy="372438"/>
           </a:xfrm>
           <a:prstGeom prst="straightConnector1">
             <a:avLst/>
@@ -23852,8 +24786,8 @@
         </p:nvSpPr>
         <p:spPr>
           <a:xfrm>
-            <a:off x="2203900" y="3075250"/>
-            <a:ext cx="2796900" cy="708600"/>
+            <a:off x="352162" y="3084475"/>
+            <a:ext cx="2055936" cy="708600"/>
           </a:xfrm>
           <a:prstGeom prst="rect">
             <a:avLst/>
@@ -23876,7 +24810,7 @@
               <a:buNone/>
             </a:pPr>
             <a:r>
-              <a:rPr lang="en-US" sz="1800"/>
+              <a:rPr lang="en-US" sz="1800" dirty="0"/>
               <a:t>Remote Tracking Branch</a:t>
             </a:r>
           </a:p>
@@ -23890,8 +24824,8 @@
         </p:nvSpPr>
         <p:spPr>
           <a:xfrm>
-            <a:off x="7206775" y="1378925"/>
-            <a:ext cx="1937100" cy="708600"/>
+            <a:off x="7619999" y="1378925"/>
+            <a:ext cx="1523875" cy="708600"/>
           </a:xfrm>
           <a:prstGeom prst="rect">
             <a:avLst/>
@@ -23914,7 +24848,7 @@
               <a:buNone/>
             </a:pPr>
             <a:r>
-              <a:rPr lang="en-US" sz="1800"/>
+              <a:rPr lang="en-US" sz="1800" dirty="0"/>
               <a:t>Tracking Branch (Local)</a:t>
             </a:r>
           </a:p>
@@ -23928,7 +24862,7 @@
         </p:nvSpPr>
         <p:spPr>
           <a:xfrm>
-            <a:off x="6355975" y="850113"/>
+            <a:off x="6254945" y="833589"/>
             <a:ext cx="838200" cy="355500"/>
           </a:xfrm>
           <a:prstGeom prst="rect">
@@ -23960,7 +24894,7 @@
               <a:buNone/>
             </a:pPr>
             <a:r>
-              <a:rPr lang="en-US">
+              <a:rPr lang="en-US" dirty="0">
                 <a:solidFill>
                   <a:srgbClr val="FFFFFF"/>
                 </a:solidFill>
@@ -23974,14 +24908,16 @@
         <p:nvCxnSpPr>
           <p:cNvPr id="391" name="Shape 391"/>
           <p:cNvCxnSpPr>
+            <a:cxnSpLocks/>
+            <a:stCxn id="390" idx="2"/>
             <a:endCxn id="385" idx="0"/>
           </p:cNvCxnSpPr>
           <p:nvPr/>
         </p:nvCxnSpPr>
         <p:spPr>
           <a:xfrm>
-            <a:off x="6775075" y="1152713"/>
-            <a:ext cx="0" cy="325800"/>
+            <a:off x="6674045" y="1189089"/>
+            <a:ext cx="1" cy="254608"/>
           </a:xfrm>
           <a:prstGeom prst="straightConnector1">
             <a:avLst/>
@@ -24171,7 +25107,7 @@
         </p:nvSpPr>
         <p:spPr>
           <a:xfrm>
-            <a:off x="6182700" y="2801525"/>
+            <a:off x="6366350" y="2604229"/>
             <a:ext cx="2889300" cy="4065300"/>
           </a:xfrm>
           <a:prstGeom prst="rect">
@@ -24205,7 +25141,7 @@
               <a:buChar char="●"/>
             </a:pPr>
             <a:r>
-              <a:rPr lang="en-US" sz="1800">
+              <a:rPr lang="en-US" sz="1800" dirty="0">
                 <a:solidFill>
                   <a:srgbClr val="333333"/>
                 </a:solidFill>
@@ -24213,10 +25149,10 @@
                   <a:srgbClr val="FFFFFF"/>
                 </a:highlight>
               </a:rPr>
-              <a:t>$ git rebase</a:t>
+              <a:t>$ git rebase origin/master</a:t>
             </a:r>
             <a:br>
-              <a:rPr lang="en-US" sz="1800">
+              <a:rPr lang="en-US" sz="1800" dirty="0">
                 <a:solidFill>
                   <a:srgbClr val="333333"/>
                 </a:solidFill>
@@ -24226,7 +25162,7 @@
               </a:rPr>
             </a:br>
             <a:r>
-              <a:rPr lang="en-US" sz="2400">
+              <a:rPr lang="en-US" sz="2400" dirty="0">
                 <a:solidFill>
                   <a:srgbClr val="333333"/>
                 </a:solidFill>
@@ -24251,7 +25187,7 @@
               <a:buNone/>
             </a:pPr>
             <a:r>
-              <a:rPr lang="en-US" sz="2400">
+              <a:rPr lang="en-US" sz="2400" dirty="0">
                 <a:solidFill>
                   <a:srgbClr val="333333"/>
                 </a:solidFill>
@@ -24259,7 +25195,7 @@
                   <a:srgbClr val="FFFFFF"/>
                 </a:highlight>
               </a:rPr>
-              <a:t>Applying: diff/patch of commit 6dfo into commit 3f9f9</a:t>
+              <a:t>Applying: diff/patch of commit 6dfo on top of origin/master to create commit 3f9f9</a:t>
             </a:r>
           </a:p>
           <a:p>
@@ -24275,7 +25211,7 @@
               </a:spcAft>
               <a:buNone/>
             </a:pPr>
-            <a:endParaRPr sz="2400">
+            <a:endParaRPr sz="2400" dirty="0">
               <a:solidFill>
                 <a:srgbClr val="333333"/>
               </a:solidFill>
@@ -24291,7 +25227,7 @@
               </a:spcBef>
               <a:buNone/>
             </a:pPr>
-            <a:endParaRPr sz="2400" b="1"/>
+            <a:endParaRPr sz="2400" b="1" dirty="0"/>
           </a:p>
         </p:txBody>
       </p:sp>
@@ -24475,6 +25411,174 @@
           </a:ln>
         </p:spPr>
       </p:cxnSp>
+      <p:sp>
+        <p:nvSpPr>
+          <p:cNvPr id="14" name="Shape 269">
+            <a:extLst>
+              <a:ext uri="{FF2B5EF4-FFF2-40B4-BE49-F238E27FC236}">
+                <a16:creationId xmlns:a16="http://schemas.microsoft.com/office/drawing/2014/main" id="{5F36A1DE-9CD7-8B9D-0B37-1F361757147C}"/>
+              </a:ext>
+            </a:extLst>
+          </p:cNvPr>
+          <p:cNvSpPr/>
+          <p:nvPr/>
+        </p:nvSpPr>
+        <p:spPr>
+          <a:xfrm>
+            <a:off x="1844780" y="6272400"/>
+            <a:ext cx="2055938" cy="546000"/>
+          </a:xfrm>
+          <a:prstGeom prst="rect">
+            <a:avLst/>
+          </a:prstGeom>
+          <a:solidFill>
+            <a:schemeClr val="lt2"/>
+          </a:solidFill>
+          <a:ln w="19050" cap="flat" cmpd="sng">
+            <a:solidFill>
+              <a:schemeClr val="dk2"/>
+            </a:solidFill>
+            <a:prstDash val="solid"/>
+            <a:round/>
+            <a:headEnd type="none" w="med" len="med"/>
+            <a:tailEnd type="none" w="med" len="med"/>
+          </a:ln>
+        </p:spPr>
+        <p:txBody>
+          <a:bodyPr wrap="square" lIns="91425" tIns="91425" rIns="91425" bIns="91425" anchor="ctr" anchorCtr="0">
+            <a:noAutofit/>
+          </a:bodyPr>
+          <a:lstStyle/>
+          <a:p>
+            <a:pPr lvl="0" algn="ctr" rtl="0">
+              <a:spcBef>
+                <a:spcPts val="0"/>
+              </a:spcBef>
+              <a:buNone/>
+            </a:pPr>
+            <a:r>
+              <a:rPr lang="en-US" dirty="0"/>
+              <a:t>feat/PRJ-777</a:t>
+            </a:r>
+          </a:p>
+        </p:txBody>
+      </p:sp>
+      <p:cxnSp>
+        <p:nvCxnSpPr>
+          <p:cNvPr id="15" name="Shape 380">
+            <a:extLst>
+              <a:ext uri="{FF2B5EF4-FFF2-40B4-BE49-F238E27FC236}">
+                <a16:creationId xmlns:a16="http://schemas.microsoft.com/office/drawing/2014/main" id="{038499B2-AF21-EAD7-9016-48266F0D7CD2}"/>
+              </a:ext>
+            </a:extLst>
+          </p:cNvPr>
+          <p:cNvCxnSpPr/>
+          <p:nvPr/>
+        </p:nvCxnSpPr>
+        <p:spPr>
+          <a:xfrm rot="10800000">
+            <a:off x="3221637" y="5845500"/>
+            <a:ext cx="0" cy="426900"/>
+          </a:xfrm>
+          <a:prstGeom prst="straightConnector1">
+            <a:avLst/>
+          </a:prstGeom>
+          <a:noFill/>
+          <a:ln w="19050" cap="flat" cmpd="sng">
+            <a:solidFill>
+              <a:schemeClr val="dk2"/>
+            </a:solidFill>
+            <a:prstDash val="solid"/>
+            <a:round/>
+            <a:headEnd type="none" w="lg" len="lg"/>
+            <a:tailEnd type="triangle" w="lg" len="lg"/>
+          </a:ln>
+        </p:spPr>
+      </p:cxnSp>
+      <p:cxnSp>
+        <p:nvCxnSpPr>
+          <p:cNvPr id="16" name="Shape 380">
+            <a:extLst>
+              <a:ext uri="{FF2B5EF4-FFF2-40B4-BE49-F238E27FC236}">
+                <a16:creationId xmlns:a16="http://schemas.microsoft.com/office/drawing/2014/main" id="{7443A553-4EC3-CB9D-3E3B-2309AEECAA4E}"/>
+              </a:ext>
+            </a:extLst>
+          </p:cNvPr>
+          <p:cNvCxnSpPr/>
+          <p:nvPr/>
+        </p:nvCxnSpPr>
+        <p:spPr>
+          <a:xfrm rot="10800000">
+            <a:off x="3432600" y="2676937"/>
+            <a:ext cx="0" cy="426900"/>
+          </a:xfrm>
+          <a:prstGeom prst="straightConnector1">
+            <a:avLst/>
+          </a:prstGeom>
+          <a:noFill/>
+          <a:ln w="19050" cap="flat" cmpd="sng">
+            <a:solidFill>
+              <a:schemeClr val="dk2"/>
+            </a:solidFill>
+            <a:prstDash val="solid"/>
+            <a:round/>
+            <a:headEnd type="none" w="lg" len="lg"/>
+            <a:tailEnd type="triangle" w="lg" len="lg"/>
+          </a:ln>
+        </p:spPr>
+      </p:cxnSp>
+      <p:sp>
+        <p:nvSpPr>
+          <p:cNvPr id="20" name="Shape 269">
+            <a:extLst>
+              <a:ext uri="{FF2B5EF4-FFF2-40B4-BE49-F238E27FC236}">
+                <a16:creationId xmlns:a16="http://schemas.microsoft.com/office/drawing/2014/main" id="{77146BD0-A41F-ED51-FB9C-12D1961F9D9F}"/>
+              </a:ext>
+            </a:extLst>
+          </p:cNvPr>
+          <p:cNvSpPr/>
+          <p:nvPr/>
+        </p:nvSpPr>
+        <p:spPr>
+          <a:xfrm>
+            <a:off x="2418609" y="3114954"/>
+            <a:ext cx="2055938" cy="546000"/>
+          </a:xfrm>
+          <a:prstGeom prst="rect">
+            <a:avLst/>
+          </a:prstGeom>
+          <a:solidFill>
+            <a:schemeClr val="lt2"/>
+          </a:solidFill>
+          <a:ln w="19050" cap="flat" cmpd="sng">
+            <a:solidFill>
+              <a:schemeClr val="dk2"/>
+            </a:solidFill>
+            <a:prstDash val="solid"/>
+            <a:round/>
+            <a:headEnd type="none" w="med" len="med"/>
+            <a:tailEnd type="none" w="med" len="med"/>
+          </a:ln>
+        </p:spPr>
+        <p:txBody>
+          <a:bodyPr wrap="square" lIns="91425" tIns="91425" rIns="91425" bIns="91425" anchor="ctr" anchorCtr="0">
+            <a:noAutofit/>
+          </a:bodyPr>
+          <a:lstStyle/>
+          <a:p>
+            <a:pPr lvl="0" algn="ctr" rtl="0">
+              <a:spcBef>
+                <a:spcPts val="0"/>
+              </a:spcBef>
+              <a:buNone/>
+            </a:pPr>
+            <a:r>
+              <a:rPr lang="en-US" dirty="0"/>
+              <a:t>origin/feat/PRJ-777</a:t>
+            </a:r>
+          </a:p>
+        </p:txBody>
+      </p:sp>
     </p:spTree>
   </p:cSld>
   <p:clrMapOvr>
@@ -25097,7 +26201,7 @@
         </p:nvSpPr>
         <p:spPr>
           <a:xfrm>
-            <a:off x="6241725" y="6272400"/>
+            <a:off x="3978425" y="6288774"/>
             <a:ext cx="863400" cy="509400"/>
           </a:xfrm>
           <a:prstGeom prst="rect">
@@ -25139,15 +26243,16 @@
         <p:nvCxnSpPr>
           <p:cNvPr id="419" name="Shape 419"/>
           <p:cNvCxnSpPr>
+            <a:cxnSpLocks/>
             <a:stCxn id="418" idx="0"/>
-            <a:endCxn id="420" idx="2"/>
+            <a:endCxn id="431" idx="2"/>
           </p:cNvCxnSpPr>
           <p:nvPr/>
         </p:nvCxnSpPr>
         <p:spPr>
-          <a:xfrm rot="10800000">
-            <a:off x="6673425" y="5845500"/>
-            <a:ext cx="0" cy="426900"/>
+          <a:xfrm flipV="1">
+            <a:off x="4410125" y="5845500"/>
+            <a:ext cx="0" cy="443274"/>
           </a:xfrm>
           <a:prstGeom prst="straightConnector1">
             <a:avLst/>
@@ -25172,7 +26277,7 @@
         </p:nvSpPr>
         <p:spPr>
           <a:xfrm>
-            <a:off x="4958750" y="3107425"/>
+            <a:off x="4946000" y="3094553"/>
             <a:ext cx="1266000" cy="546000"/>
           </a:xfrm>
           <a:prstGeom prst="rect">
@@ -25204,7 +26309,7 @@
               <a:buNone/>
             </a:pPr>
             <a:r>
-              <a:rPr lang="en-US"/>
+              <a:rPr lang="en-US" dirty="0"/>
               <a:t>origin/master</a:t>
             </a:r>
           </a:p>
@@ -25214,15 +26319,15 @@
         <p:nvCxnSpPr>
           <p:cNvPr id="422" name="Shape 422"/>
           <p:cNvCxnSpPr>
-            <a:stCxn id="421" idx="0"/>
+            <a:cxnSpLocks/>
             <a:endCxn id="423" idx="2"/>
           </p:cNvCxnSpPr>
           <p:nvPr/>
         </p:nvCxnSpPr>
         <p:spPr>
-          <a:xfrm rot="10800000">
-            <a:off x="5591750" y="2647525"/>
-            <a:ext cx="0" cy="459900"/>
+          <a:xfrm flipV="1">
+            <a:off x="5591750" y="2647538"/>
+            <a:ext cx="0" cy="448771"/>
           </a:xfrm>
           <a:prstGeom prst="straightConnector1">
             <a:avLst/>
@@ -25247,8 +26352,8 @@
         </p:nvSpPr>
         <p:spPr>
           <a:xfrm>
-            <a:off x="6343375" y="1478513"/>
-            <a:ext cx="863400" cy="509400"/>
+            <a:off x="5979050" y="1478513"/>
+            <a:ext cx="1564750" cy="509400"/>
           </a:xfrm>
           <a:prstGeom prst="rect">
             <a:avLst/>
@@ -25279,8 +26384,8 @@
               <a:buNone/>
             </a:pPr>
             <a:r>
-              <a:rPr lang="en-US"/>
-              <a:t>master</a:t>
+              <a:rPr lang="en-US" dirty="0"/>
+              <a:t>feat/PRJ-777</a:t>
             </a:r>
           </a:p>
         </p:txBody>
@@ -25289,6 +26394,7 @@
         <p:nvCxnSpPr>
           <p:cNvPr id="425" name="Shape 425"/>
           <p:cNvCxnSpPr>
+            <a:cxnSpLocks/>
             <a:stCxn id="424" idx="2"/>
             <a:endCxn id="426" idx="0"/>
           </p:cNvCxnSpPr>
@@ -25296,8 +26402,8 @@
         </p:nvCxnSpPr>
         <p:spPr>
           <a:xfrm>
-            <a:off x="6775075" y="1987913"/>
-            <a:ext cx="0" cy="304200"/>
+            <a:off x="6761425" y="1987913"/>
+            <a:ext cx="13650" cy="304138"/>
           </a:xfrm>
           <a:prstGeom prst="straightConnector1">
             <a:avLst/>
@@ -25322,8 +26428,8 @@
         </p:nvSpPr>
         <p:spPr>
           <a:xfrm>
-            <a:off x="2203900" y="3075250"/>
-            <a:ext cx="2796900" cy="708600"/>
+            <a:off x="897440" y="2869237"/>
+            <a:ext cx="1146235" cy="708600"/>
           </a:xfrm>
           <a:prstGeom prst="rect">
             <a:avLst/>
@@ -25346,7 +26452,7 @@
               <a:buNone/>
             </a:pPr>
             <a:r>
-              <a:rPr lang="en-US" sz="1800"/>
+              <a:rPr lang="en-US" sz="1800" dirty="0"/>
               <a:t>Remote Tracking Branch</a:t>
             </a:r>
           </a:p>
@@ -25360,8 +26466,8 @@
         </p:nvSpPr>
         <p:spPr>
           <a:xfrm>
-            <a:off x="7206775" y="1378925"/>
-            <a:ext cx="1937100" cy="708600"/>
+            <a:off x="7727555" y="1140583"/>
+            <a:ext cx="1323237" cy="708600"/>
           </a:xfrm>
           <a:prstGeom prst="rect">
             <a:avLst/>
@@ -25384,7 +26490,7 @@
               <a:buNone/>
             </a:pPr>
             <a:r>
-              <a:rPr lang="en-US" sz="1800"/>
+              <a:rPr lang="en-US" sz="1800" dirty="0"/>
               <a:t>Tracking Branch (Local)</a:t>
             </a:r>
           </a:p>
@@ -25444,14 +26550,15 @@
         <p:nvCxnSpPr>
           <p:cNvPr id="430" name="Shape 430"/>
           <p:cNvCxnSpPr>
+            <a:cxnSpLocks/>
             <a:endCxn id="424" idx="0"/>
           </p:cNvCxnSpPr>
           <p:nvPr/>
         </p:nvCxnSpPr>
         <p:spPr>
-          <a:xfrm>
-            <a:off x="6775075" y="1152713"/>
-            <a:ext cx="0" cy="325800"/>
+          <a:xfrm flipH="1">
+            <a:off x="6761425" y="1152713"/>
+            <a:ext cx="13650" cy="325800"/>
           </a:xfrm>
           <a:prstGeom prst="straightConnector1">
             <a:avLst/>
@@ -25553,8 +26660,8 @@
         </p:nvSpPr>
         <p:spPr>
           <a:xfrm>
-            <a:off x="6978525" y="2677000"/>
-            <a:ext cx="2165700" cy="1513800"/>
+            <a:off x="7543800" y="2677000"/>
+            <a:ext cx="1600425" cy="3419000"/>
           </a:xfrm>
           <a:prstGeom prst="rect">
             <a:avLst/>
@@ -25587,7 +26694,7 @@
               <a:buChar char="●"/>
             </a:pPr>
             <a:r>
-              <a:rPr lang="en-US" sz="1800">
+              <a:rPr lang="en-US" sz="1800" dirty="0">
                 <a:solidFill>
                   <a:srgbClr val="333333"/>
                 </a:solidFill>
@@ -25598,7 +26705,7 @@
               <a:t>$ git push</a:t>
             </a:r>
             <a:br>
-              <a:rPr lang="en-US" sz="1800">
+              <a:rPr lang="en-US" sz="1800" dirty="0">
                 <a:solidFill>
                   <a:srgbClr val="333333"/>
                 </a:solidFill>
@@ -25608,7 +26715,7 @@
               </a:rPr>
             </a:br>
             <a:r>
-              <a:rPr lang="en-US" sz="2400">
+              <a:rPr lang="en-US" sz="2400" dirty="0">
                 <a:solidFill>
                   <a:srgbClr val="333333"/>
                 </a:solidFill>
@@ -25632,7 +26739,7 @@
               </a:spcAft>
               <a:buNone/>
             </a:pPr>
-            <a:endParaRPr sz="2400">
+            <a:endParaRPr sz="2400" dirty="0">
               <a:solidFill>
                 <a:srgbClr val="333333"/>
               </a:solidFill>
@@ -25648,7 +26755,7 @@
               </a:spcBef>
               <a:buNone/>
             </a:pPr>
-            <a:endParaRPr sz="2400" b="1"/>
+            <a:endParaRPr sz="2400" b="1" dirty="0"/>
           </a:p>
         </p:txBody>
       </p:sp>
@@ -25917,8 +27024,8 @@
         </p:nvSpPr>
         <p:spPr>
           <a:xfrm>
-            <a:off x="6368325" y="3162475"/>
-            <a:ext cx="610200" cy="2168100"/>
+            <a:off x="6387574" y="2825302"/>
+            <a:ext cx="610200" cy="2606286"/>
           </a:xfrm>
           <a:prstGeom prst="downArrow">
             <a:avLst>
@@ -25952,6 +27059,176 @@
               <a:buNone/>
             </a:pPr>
             <a:endParaRPr/>
+          </a:p>
+        </p:txBody>
+      </p:sp>
+      <p:cxnSp>
+        <p:nvCxnSpPr>
+          <p:cNvPr id="8" name="Shape 380">
+            <a:extLst>
+              <a:ext uri="{FF2B5EF4-FFF2-40B4-BE49-F238E27FC236}">
+                <a16:creationId xmlns:a16="http://schemas.microsoft.com/office/drawing/2014/main" id="{710486FB-EA5A-71CE-4307-82ECFE648C7C}"/>
+              </a:ext>
+            </a:extLst>
+          </p:cNvPr>
+          <p:cNvCxnSpPr/>
+          <p:nvPr/>
+        </p:nvCxnSpPr>
+        <p:spPr>
+          <a:xfrm rot="10800000">
+            <a:off x="6651741" y="5810658"/>
+            <a:ext cx="0" cy="426900"/>
+          </a:xfrm>
+          <a:prstGeom prst="straightConnector1">
+            <a:avLst/>
+          </a:prstGeom>
+          <a:noFill/>
+          <a:ln w="19050" cap="flat" cmpd="sng">
+            <a:solidFill>
+              <a:schemeClr val="dk2"/>
+            </a:solidFill>
+            <a:prstDash val="solid"/>
+            <a:round/>
+            <a:headEnd type="none" w="lg" len="lg"/>
+            <a:tailEnd type="triangle" w="lg" len="lg"/>
+          </a:ln>
+        </p:spPr>
+      </p:cxnSp>
+      <p:sp>
+        <p:nvSpPr>
+          <p:cNvPr id="9" name="Shape 269">
+            <a:extLst>
+              <a:ext uri="{FF2B5EF4-FFF2-40B4-BE49-F238E27FC236}">
+                <a16:creationId xmlns:a16="http://schemas.microsoft.com/office/drawing/2014/main" id="{59C92189-9734-4F4B-C387-EFB6615831BC}"/>
+              </a:ext>
+            </a:extLst>
+          </p:cNvPr>
+          <p:cNvSpPr/>
+          <p:nvPr/>
+        </p:nvSpPr>
+        <p:spPr>
+          <a:xfrm>
+            <a:off x="5637750" y="6248675"/>
+            <a:ext cx="2055938" cy="546000"/>
+          </a:xfrm>
+          <a:prstGeom prst="rect">
+            <a:avLst/>
+          </a:prstGeom>
+          <a:solidFill>
+            <a:schemeClr val="lt2"/>
+          </a:solidFill>
+          <a:ln w="19050" cap="flat" cmpd="sng">
+            <a:solidFill>
+              <a:schemeClr val="dk2"/>
+            </a:solidFill>
+            <a:prstDash val="solid"/>
+            <a:round/>
+            <a:headEnd type="none" w="med" len="med"/>
+            <a:tailEnd type="none" w="med" len="med"/>
+          </a:ln>
+        </p:spPr>
+        <p:txBody>
+          <a:bodyPr wrap="square" lIns="91425" tIns="91425" rIns="91425" bIns="91425" anchor="ctr" anchorCtr="0">
+            <a:noAutofit/>
+          </a:bodyPr>
+          <a:lstStyle/>
+          <a:p>
+            <a:pPr lvl="0" algn="ctr" rtl="0">
+              <a:spcBef>
+                <a:spcPts val="0"/>
+              </a:spcBef>
+              <a:buNone/>
+            </a:pPr>
+            <a:r>
+              <a:rPr lang="en-US" dirty="0"/>
+              <a:t>feat/PRJ-777</a:t>
+            </a:r>
+          </a:p>
+        </p:txBody>
+      </p:sp>
+      <p:cxnSp>
+        <p:nvCxnSpPr>
+          <p:cNvPr id="10" name="Shape 380">
+            <a:extLst>
+              <a:ext uri="{FF2B5EF4-FFF2-40B4-BE49-F238E27FC236}">
+                <a16:creationId xmlns:a16="http://schemas.microsoft.com/office/drawing/2014/main" id="{93CDAE70-4668-B885-45DC-EF336EAAC62F}"/>
+              </a:ext>
+            </a:extLst>
+          </p:cNvPr>
+          <p:cNvCxnSpPr>
+            <a:cxnSpLocks/>
+          </p:cNvCxnSpPr>
+          <p:nvPr/>
+        </p:nvCxnSpPr>
+        <p:spPr>
+          <a:xfrm flipV="1">
+            <a:off x="3321618" y="2659488"/>
+            <a:ext cx="0" cy="426900"/>
+          </a:xfrm>
+          <a:prstGeom prst="straightConnector1">
+            <a:avLst/>
+          </a:prstGeom>
+          <a:noFill/>
+          <a:ln w="19050" cap="flat" cmpd="sng">
+            <a:solidFill>
+              <a:schemeClr val="dk2"/>
+            </a:solidFill>
+            <a:prstDash val="solid"/>
+            <a:round/>
+            <a:headEnd type="none" w="lg" len="lg"/>
+            <a:tailEnd type="triangle" w="lg" len="lg"/>
+          </a:ln>
+        </p:spPr>
+      </p:cxnSp>
+      <p:sp>
+        <p:nvSpPr>
+          <p:cNvPr id="11" name="Shape 269">
+            <a:extLst>
+              <a:ext uri="{FF2B5EF4-FFF2-40B4-BE49-F238E27FC236}">
+                <a16:creationId xmlns:a16="http://schemas.microsoft.com/office/drawing/2014/main" id="{2979DD7D-F776-B608-310D-4814481A5454}"/>
+              </a:ext>
+            </a:extLst>
+          </p:cNvPr>
+          <p:cNvSpPr/>
+          <p:nvPr/>
+        </p:nvSpPr>
+        <p:spPr>
+          <a:xfrm>
+            <a:off x="2453217" y="3097505"/>
+            <a:ext cx="1910347" cy="546000"/>
+          </a:xfrm>
+          <a:prstGeom prst="rect">
+            <a:avLst/>
+          </a:prstGeom>
+          <a:solidFill>
+            <a:schemeClr val="lt2"/>
+          </a:solidFill>
+          <a:ln w="19050" cap="flat" cmpd="sng">
+            <a:solidFill>
+              <a:schemeClr val="dk2"/>
+            </a:solidFill>
+            <a:prstDash val="solid"/>
+            <a:round/>
+            <a:headEnd type="none" w="med" len="med"/>
+            <a:tailEnd type="none" w="med" len="med"/>
+          </a:ln>
+        </p:spPr>
+        <p:txBody>
+          <a:bodyPr wrap="square" lIns="91425" tIns="91425" rIns="91425" bIns="91425" anchor="ctr" anchorCtr="0">
+            <a:noAutofit/>
+          </a:bodyPr>
+          <a:lstStyle/>
+          <a:p>
+            <a:pPr lvl="0" algn="ctr" rtl="0">
+              <a:spcBef>
+                <a:spcPts val="0"/>
+              </a:spcBef>
+              <a:buNone/>
+            </a:pPr>
+            <a:r>
+              <a:rPr lang="en-US" dirty="0"/>
+              <a:t>origin/feat/PRJ-777</a:t>
+            </a:r>
           </a:p>
         </p:txBody>
       </p:sp>
@@ -26577,7 +27854,7 @@
         </p:nvSpPr>
         <p:spPr>
           <a:xfrm>
-            <a:off x="6241725" y="6272400"/>
+            <a:off x="3978425" y="6261974"/>
             <a:ext cx="863400" cy="509400"/>
           </a:xfrm>
           <a:prstGeom prst="rect">
@@ -26619,15 +27896,16 @@
         <p:nvCxnSpPr>
           <p:cNvPr id="459" name="Shape 459"/>
           <p:cNvCxnSpPr>
+            <a:cxnSpLocks/>
             <a:stCxn id="458" idx="0"/>
-            <a:endCxn id="460" idx="2"/>
+            <a:endCxn id="470" idx="2"/>
           </p:cNvCxnSpPr>
           <p:nvPr/>
         </p:nvCxnSpPr>
         <p:spPr>
-          <a:xfrm rot="10800000">
-            <a:off x="6673425" y="5845500"/>
-            <a:ext cx="0" cy="426900"/>
+          <a:xfrm flipV="1">
+            <a:off x="4410125" y="5845500"/>
+            <a:ext cx="0" cy="416474"/>
           </a:xfrm>
           <a:prstGeom prst="straightConnector1">
             <a:avLst/>
@@ -26652,7 +27930,7 @@
         </p:nvSpPr>
         <p:spPr>
           <a:xfrm>
-            <a:off x="6142075" y="3152700"/>
+            <a:off x="4319128" y="3109231"/>
             <a:ext cx="1266000" cy="546000"/>
           </a:xfrm>
           <a:prstGeom prst="rect">
@@ -26684,7 +27962,7 @@
               <a:buNone/>
             </a:pPr>
             <a:r>
-              <a:rPr lang="en-US"/>
+              <a:rPr lang="en-US" dirty="0"/>
               <a:t>origin/master</a:t>
             </a:r>
           </a:p>
@@ -26694,15 +27972,16 @@
         <p:nvCxnSpPr>
           <p:cNvPr id="462" name="Shape 462"/>
           <p:cNvCxnSpPr>
+            <a:cxnSpLocks/>
             <a:stCxn id="461" idx="0"/>
-            <a:endCxn id="463" idx="2"/>
+            <a:endCxn id="473" idx="2"/>
           </p:cNvCxnSpPr>
           <p:nvPr/>
         </p:nvCxnSpPr>
         <p:spPr>
-          <a:xfrm rot="10800000">
-            <a:off x="6775075" y="2647500"/>
-            <a:ext cx="0" cy="505200"/>
+          <a:xfrm flipV="1">
+            <a:off x="4952128" y="2677000"/>
+            <a:ext cx="614947" cy="432231"/>
           </a:xfrm>
           <a:prstGeom prst="straightConnector1">
             <a:avLst/>
@@ -26727,8 +28006,8 @@
         </p:nvSpPr>
         <p:spPr>
           <a:xfrm>
-            <a:off x="6343375" y="1478513"/>
-            <a:ext cx="863400" cy="509400"/>
+            <a:off x="5791199" y="1509673"/>
+            <a:ext cx="1937099" cy="509400"/>
           </a:xfrm>
           <a:prstGeom prst="rect">
             <a:avLst/>
@@ -26759,8 +28038,8 @@
               <a:buNone/>
             </a:pPr>
             <a:r>
-              <a:rPr lang="en-US"/>
-              <a:t>master</a:t>
+              <a:rPr lang="en-US" dirty="0"/>
+              <a:t>feat/PRJ-777</a:t>
             </a:r>
           </a:p>
         </p:txBody>
@@ -26769,15 +28048,16 @@
         <p:nvCxnSpPr>
           <p:cNvPr id="465" name="Shape 465"/>
           <p:cNvCxnSpPr>
+            <a:cxnSpLocks/>
             <a:stCxn id="464" idx="2"/>
             <a:endCxn id="463" idx="0"/>
           </p:cNvCxnSpPr>
           <p:nvPr/>
         </p:nvCxnSpPr>
         <p:spPr>
-          <a:xfrm>
-            <a:off x="6775075" y="1987913"/>
-            <a:ext cx="0" cy="304200"/>
+          <a:xfrm flipH="1">
+            <a:off x="6757593" y="2019073"/>
+            <a:ext cx="2156" cy="304060"/>
           </a:xfrm>
           <a:prstGeom prst="straightConnector1">
             <a:avLst/>
@@ -26802,8 +28082,8 @@
         </p:nvSpPr>
         <p:spPr>
           <a:xfrm>
-            <a:off x="3173550" y="3074700"/>
-            <a:ext cx="2796900" cy="708600"/>
+            <a:off x="1452075" y="3097625"/>
+            <a:ext cx="1855646" cy="708600"/>
           </a:xfrm>
           <a:prstGeom prst="rect">
             <a:avLst/>
@@ -26826,7 +28106,7 @@
               <a:buNone/>
             </a:pPr>
             <a:r>
-              <a:rPr lang="en-US" sz="1800"/>
+              <a:rPr lang="en-US" sz="1800" dirty="0"/>
               <a:t>Remote Tracking Branch</a:t>
             </a:r>
           </a:p>
@@ -26840,8 +28120,8 @@
         </p:nvSpPr>
         <p:spPr>
           <a:xfrm>
-            <a:off x="7408075" y="1152725"/>
-            <a:ext cx="1937100" cy="708600"/>
+            <a:off x="7578830" y="575710"/>
+            <a:ext cx="1565170" cy="708600"/>
           </a:xfrm>
           <a:prstGeom prst="rect">
             <a:avLst/>
@@ -26864,7 +28144,7 @@
               <a:buNone/>
             </a:pPr>
             <a:r>
-              <a:rPr lang="en-US" sz="1800"/>
+              <a:rPr lang="en-US" sz="1800" dirty="0"/>
               <a:t>Tracking Branch (Local)</a:t>
             </a:r>
           </a:p>
@@ -26924,14 +28204,15 @@
         <p:nvCxnSpPr>
           <p:cNvPr id="469" name="Shape 469"/>
           <p:cNvCxnSpPr>
+            <a:cxnSpLocks/>
             <a:endCxn id="464" idx="0"/>
           </p:cNvCxnSpPr>
           <p:nvPr/>
         </p:nvCxnSpPr>
         <p:spPr>
           <a:xfrm>
-            <a:off x="6775075" y="1152713"/>
-            <a:ext cx="0" cy="325800"/>
+            <a:off x="6740630" y="1183873"/>
+            <a:ext cx="19119" cy="325800"/>
           </a:xfrm>
           <a:prstGeom prst="straightConnector1">
             <a:avLst/>
@@ -27067,7 +28348,7 @@
               <a:buChar char="●"/>
             </a:pPr>
             <a:r>
-              <a:rPr lang="en-US" sz="1800">
+              <a:rPr lang="en-US" sz="1800" dirty="0">
                 <a:solidFill>
                   <a:srgbClr val="333333"/>
                 </a:solidFill>
@@ -27091,7 +28372,7 @@
               </a:spcAft>
               <a:buNone/>
             </a:pPr>
-            <a:endParaRPr sz="2400">
+            <a:endParaRPr sz="2400" dirty="0">
               <a:solidFill>
                 <a:srgbClr val="333333"/>
               </a:solidFill>
@@ -27107,7 +28388,7 @@
               </a:spcBef>
               <a:buNone/>
             </a:pPr>
-            <a:endParaRPr sz="2400" b="1"/>
+            <a:endParaRPr sz="2400" b="1" dirty="0"/>
           </a:p>
         </p:txBody>
       </p:sp>
@@ -27119,7 +28400,7 @@
         </p:nvSpPr>
         <p:spPr>
           <a:xfrm>
-            <a:off x="5204450" y="2292038"/>
+            <a:off x="5179775" y="2321500"/>
             <a:ext cx="774600" cy="355500"/>
           </a:xfrm>
           <a:prstGeom prst="roundRect">
@@ -27170,8 +28451,8 @@
         </p:nvCxnSpPr>
         <p:spPr>
           <a:xfrm flipH="1">
-            <a:off x="3851750" y="2469788"/>
-            <a:ext cx="1352700" cy="29400"/>
+            <a:off x="3851650" y="2499250"/>
+            <a:ext cx="1328125" cy="0"/>
           </a:xfrm>
           <a:prstGeom prst="straightConnector1">
             <a:avLst/>
@@ -27222,7 +28503,7 @@
         </p:nvSpPr>
         <p:spPr>
           <a:xfrm>
-            <a:off x="6387775" y="2292051"/>
+            <a:off x="6370293" y="2323133"/>
             <a:ext cx="774600" cy="355500"/>
           </a:xfrm>
           <a:prstGeom prst="roundRect">
@@ -27272,9 +28553,9 @@
           <p:nvPr/>
         </p:nvCxnSpPr>
         <p:spPr>
-          <a:xfrm rot="10800000">
-            <a:off x="5979175" y="2469801"/>
-            <a:ext cx="408600" cy="0"/>
+          <a:xfrm flipH="1" flipV="1">
+            <a:off x="5954375" y="2499250"/>
+            <a:ext cx="415918" cy="1633"/>
           </a:xfrm>
           <a:prstGeom prst="straightConnector1">
             <a:avLst/>
@@ -27368,6 +28649,178 @@
           </a:ln>
         </p:spPr>
       </p:cxnSp>
+      <p:cxnSp>
+        <p:nvCxnSpPr>
+          <p:cNvPr id="17" name="Shape 380">
+            <a:extLst>
+              <a:ext uri="{FF2B5EF4-FFF2-40B4-BE49-F238E27FC236}">
+                <a16:creationId xmlns:a16="http://schemas.microsoft.com/office/drawing/2014/main" id="{AAC57456-22F8-962D-1BBB-ECBADC25B401}"/>
+              </a:ext>
+            </a:extLst>
+          </p:cNvPr>
+          <p:cNvCxnSpPr>
+            <a:cxnSpLocks/>
+          </p:cNvCxnSpPr>
+          <p:nvPr/>
+        </p:nvCxnSpPr>
+        <p:spPr>
+          <a:xfrm flipV="1">
+            <a:off x="6746302" y="2675412"/>
+            <a:ext cx="0" cy="426900"/>
+          </a:xfrm>
+          <a:prstGeom prst="straightConnector1">
+            <a:avLst/>
+          </a:prstGeom>
+          <a:noFill/>
+          <a:ln w="19050" cap="flat" cmpd="sng">
+            <a:solidFill>
+              <a:schemeClr val="dk2"/>
+            </a:solidFill>
+            <a:prstDash val="solid"/>
+            <a:round/>
+            <a:headEnd type="none" w="lg" len="lg"/>
+            <a:tailEnd type="triangle" w="lg" len="lg"/>
+          </a:ln>
+        </p:spPr>
+      </p:cxnSp>
+      <p:sp>
+        <p:nvSpPr>
+          <p:cNvPr id="18" name="Shape 269">
+            <a:extLst>
+              <a:ext uri="{FF2B5EF4-FFF2-40B4-BE49-F238E27FC236}">
+                <a16:creationId xmlns:a16="http://schemas.microsoft.com/office/drawing/2014/main" id="{037DC6C4-E27D-B9D4-4FB4-E79864C7265C}"/>
+              </a:ext>
+            </a:extLst>
+          </p:cNvPr>
+          <p:cNvSpPr/>
+          <p:nvPr/>
+        </p:nvSpPr>
+        <p:spPr>
+          <a:xfrm>
+            <a:off x="5877901" y="3113429"/>
+            <a:ext cx="1910347" cy="546000"/>
+          </a:xfrm>
+          <a:prstGeom prst="rect">
+            <a:avLst/>
+          </a:prstGeom>
+          <a:solidFill>
+            <a:schemeClr val="lt2"/>
+          </a:solidFill>
+          <a:ln w="19050" cap="flat" cmpd="sng">
+            <a:solidFill>
+              <a:schemeClr val="dk2"/>
+            </a:solidFill>
+            <a:prstDash val="solid"/>
+            <a:round/>
+            <a:headEnd type="none" w="med" len="med"/>
+            <a:tailEnd type="none" w="med" len="med"/>
+          </a:ln>
+        </p:spPr>
+        <p:txBody>
+          <a:bodyPr wrap="square" lIns="91425" tIns="91425" rIns="91425" bIns="91425" anchor="ctr" anchorCtr="0">
+            <a:noAutofit/>
+          </a:bodyPr>
+          <a:lstStyle/>
+          <a:p>
+            <a:pPr lvl="0" algn="ctr" rtl="0">
+              <a:spcBef>
+                <a:spcPts val="0"/>
+              </a:spcBef>
+              <a:buNone/>
+            </a:pPr>
+            <a:r>
+              <a:rPr lang="en-US" dirty="0"/>
+              <a:t>origin/feat/PRJ-777</a:t>
+            </a:r>
+          </a:p>
+        </p:txBody>
+      </p:sp>
+      <p:cxnSp>
+        <p:nvCxnSpPr>
+          <p:cNvPr id="20" name="Shape 380">
+            <a:extLst>
+              <a:ext uri="{FF2B5EF4-FFF2-40B4-BE49-F238E27FC236}">
+                <a16:creationId xmlns:a16="http://schemas.microsoft.com/office/drawing/2014/main" id="{24CF52AD-2B95-815F-4C5B-DB79A1242DB1}"/>
+              </a:ext>
+            </a:extLst>
+          </p:cNvPr>
+          <p:cNvCxnSpPr>
+            <a:cxnSpLocks/>
+          </p:cNvCxnSpPr>
+          <p:nvPr/>
+        </p:nvCxnSpPr>
+        <p:spPr>
+          <a:xfrm flipV="1">
+            <a:off x="6659600" y="5809100"/>
+            <a:ext cx="0" cy="426900"/>
+          </a:xfrm>
+          <a:prstGeom prst="straightConnector1">
+            <a:avLst/>
+          </a:prstGeom>
+          <a:noFill/>
+          <a:ln w="19050" cap="flat" cmpd="sng">
+            <a:solidFill>
+              <a:schemeClr val="dk2"/>
+            </a:solidFill>
+            <a:prstDash val="solid"/>
+            <a:round/>
+            <a:headEnd type="none" w="lg" len="lg"/>
+            <a:tailEnd type="triangle" w="lg" len="lg"/>
+          </a:ln>
+        </p:spPr>
+      </p:cxnSp>
+      <p:sp>
+        <p:nvSpPr>
+          <p:cNvPr id="21" name="Shape 269">
+            <a:extLst>
+              <a:ext uri="{FF2B5EF4-FFF2-40B4-BE49-F238E27FC236}">
+                <a16:creationId xmlns:a16="http://schemas.microsoft.com/office/drawing/2014/main" id="{16FCD6BD-B9FE-9470-66FE-BE611566BFA5}"/>
+              </a:ext>
+            </a:extLst>
+          </p:cNvPr>
+          <p:cNvSpPr/>
+          <p:nvPr/>
+        </p:nvSpPr>
+        <p:spPr>
+          <a:xfrm>
+            <a:off x="5791199" y="6247117"/>
+            <a:ext cx="1910347" cy="546000"/>
+          </a:xfrm>
+          <a:prstGeom prst="rect">
+            <a:avLst/>
+          </a:prstGeom>
+          <a:solidFill>
+            <a:schemeClr val="lt2"/>
+          </a:solidFill>
+          <a:ln w="19050" cap="flat" cmpd="sng">
+            <a:solidFill>
+              <a:schemeClr val="dk2"/>
+            </a:solidFill>
+            <a:prstDash val="solid"/>
+            <a:round/>
+            <a:headEnd type="none" w="med" len="med"/>
+            <a:tailEnd type="none" w="med" len="med"/>
+          </a:ln>
+        </p:spPr>
+        <p:txBody>
+          <a:bodyPr wrap="square" lIns="91425" tIns="91425" rIns="91425" bIns="91425" anchor="ctr" anchorCtr="0">
+            <a:noAutofit/>
+          </a:bodyPr>
+          <a:lstStyle/>
+          <a:p>
+            <a:pPr lvl="0" algn="ctr" rtl="0">
+              <a:spcBef>
+                <a:spcPts val="0"/>
+              </a:spcBef>
+              <a:buNone/>
+            </a:pPr>
+            <a:r>
+              <a:rPr lang="en-US" dirty="0"/>
+              <a:t>feat/PRJ-777</a:t>
+            </a:r>
+          </a:p>
+        </p:txBody>
+      </p:sp>
     </p:spTree>
   </p:cSld>
   <p:clrMapOvr>

--- a/WorkStuff/Courses/Git/Git_General_Training_Lab/Git_General_Training_ap.ppt.pptx
+++ b/WorkStuff/Courses/Git/Git_General_Training_Lab/Git_General_Training_ap.ppt.pptx
@@ -17550,8 +17550,13 @@
             </a:pPr>
             <a:r>
               <a:rPr lang="en-US" dirty="0"/>
-              <a:t>feat/PRJ--777</a:t>
-            </a:r>
+              <a:t>feat</a:t>
+            </a:r>
+            <a:r>
+              <a:rPr lang="en-US"/>
+              <a:t>/PRJ-777</a:t>
+            </a:r>
+            <a:endParaRPr lang="en-US" dirty="0"/>
           </a:p>
         </p:txBody>
       </p:sp>

--- a/WorkStuff/Courses/Git/Git_General_Training_Lab/Git_General_Training_ap.ppt.pptx
+++ b/WorkStuff/Courses/Git/Git_General_Training_Lab/Git_General_Training_ap.ppt.pptx
@@ -1682,7 +1682,7 @@
         <p:spPr>
           <a:xfrm>
             <a:off x="1158875" y="692150"/>
-            <a:ext cx="4616450" cy="3462337"/>
+            <a:ext cx="4616450" cy="3462338"/>
           </a:xfrm>
           <a:custGeom>
             <a:avLst/>
@@ -5293,7 +5293,7 @@
         <p:spPr>
           <a:xfrm>
             <a:off x="1158875" y="692150"/>
-            <a:ext cx="4616450" cy="3462337"/>
+            <a:ext cx="4616450" cy="3462338"/>
           </a:xfrm>
           <a:custGeom>
             <a:avLst/>
@@ -12748,46 +12748,6 @@
               <a:t>Ilya Rokhkin</a:t>
             </a:r>
           </a:p>
-          <a:p>
-            <a:pPr marL="0" marR="0" lvl="0" indent="0" algn="l" rtl="0">
-              <a:lnSpc>
-                <a:spcPct val="100000"/>
-              </a:lnSpc>
-              <a:spcBef>
-                <a:spcPts val="0"/>
-              </a:spcBef>
-              <a:spcAft>
-                <a:spcPts val="0"/>
-              </a:spcAft>
-              <a:buClr>
-                <a:srgbClr val="EA411A"/>
-              </a:buClr>
-              <a:buSzPct val="25000"/>
-              <a:buFont typeface="Merriweather"/>
-              <a:buNone/>
-            </a:pPr>
-            <a:r>
-              <a:rPr lang="en-US" sz="2000" b="0" i="0" u="none" strike="noStrike" cap="none" dirty="0">
-                <a:solidFill>
-                  <a:srgbClr val="000000"/>
-                </a:solidFill>
-                <a:latin typeface="Merriweather"/>
-                <a:ea typeface="Merriweather"/>
-                <a:cs typeface="Merriweather"/>
-                <a:sym typeface="Merriweather"/>
-              </a:rPr>
-              <a:t>2023</a:t>
-            </a:r>
-            <a:endParaRPr lang="en-US" sz="2000" b="0" dirty="0">
-              <a:solidFill>
-                <a:srgbClr val="000000"/>
-              </a:solidFill>
-              <a:latin typeface="Merriweather"/>
-              <a:ea typeface="Merriweather"/>
-              <a:cs typeface="Merriweather"/>
-              <a:sym typeface="Merriweather"/>
-            </a:endParaRPr>
-          </a:p>
         </p:txBody>
       </p:sp>
     </p:spTree>
@@ -12981,7 +12941,7 @@
               <a:buChar char="•"/>
             </a:pPr>
             <a:r>
-              <a:rPr lang="en-US" sz="2000" b="0" i="0" u="none">
+              <a:rPr lang="en-US" sz="2000" b="0" i="0" u="none" dirty="0">
                 <a:solidFill>
                   <a:srgbClr val="5E5E5E"/>
                 </a:solidFill>
@@ -12990,10 +12950,10 @@
                 <a:cs typeface="Arial"/>
                 <a:sym typeface="Arial"/>
               </a:rPr>
-              <a:t>Working tree has all files and folders as found in your HEAD,</a:t>
+              <a:t>The working tree has all files and folders as found in your HEAD,</a:t>
             </a:r>
             <a:br>
-              <a:rPr lang="en-US" sz="2000" b="0" i="0" u="none">
+              <a:rPr lang="en-US" sz="2000" b="0" i="0" u="none" dirty="0">
                 <a:solidFill>
                   <a:srgbClr val="5E5E5E"/>
                 </a:solidFill>
@@ -13004,7 +12964,7 @@
               </a:rPr>
             </a:br>
             <a:r>
-              <a:rPr lang="en-US" sz="2000" b="0" i="0" u="none">
+              <a:rPr lang="en-US" sz="2000" b="0" i="0" u="none" dirty="0">
                 <a:solidFill>
                   <a:srgbClr val="5E5E5E"/>
                 </a:solidFill>
@@ -13016,7 +12976,7 @@
               <a:t>plus the changes you made since your last commit</a:t>
             </a:r>
             <a:br>
-              <a:rPr lang="en-US" sz="2000" b="0" i="0" u="none">
+              <a:rPr lang="en-US" sz="2000" b="0" i="0" u="none" dirty="0">
                 <a:solidFill>
                   <a:srgbClr val="5E5E5E"/>
                 </a:solidFill>
@@ -13026,7 +12986,7 @@
                 <a:sym typeface="Arial"/>
               </a:rPr>
             </a:br>
-            <a:endParaRPr lang="en-US" sz="2000" b="0" i="0" u="none">
+            <a:endParaRPr lang="en-US" sz="2000" b="0" i="0" u="none" dirty="0">
               <a:solidFill>
                 <a:srgbClr val="5E5E5E"/>
               </a:solidFill>
@@ -13055,7 +13015,7 @@
               <a:buChar char="•"/>
             </a:pPr>
             <a:r>
-              <a:rPr lang="en-US" sz="2000" b="0" i="0" u="none">
+              <a:rPr lang="en-US" sz="2000" b="0" i="0" u="none" dirty="0">
                 <a:solidFill>
                   <a:srgbClr val="5E5E5E"/>
                 </a:solidFill>
@@ -13067,7 +13027,7 @@
               <a:t> There is only ONE main working tree per repository (and only 1 .git</a:t>
             </a:r>
             <a:br>
-              <a:rPr lang="en-US" sz="2000" b="0" i="0" u="none">
+              <a:rPr lang="en-US" sz="2000" b="0" i="0" u="none" dirty="0">
                 <a:solidFill>
                   <a:srgbClr val="5E5E5E"/>
                 </a:solidFill>
@@ -13078,7 +13038,7 @@
               </a:rPr>
             </a:br>
             <a:r>
-              <a:rPr lang="en-US" sz="2000" b="0" i="0" u="none">
+              <a:rPr lang="en-US" sz="2000" b="0" i="0" u="none" dirty="0">
                 <a:solidFill>
                   <a:srgbClr val="5E5E5E"/>
                 </a:solidFill>
@@ -13104,7 +13064,7 @@
               <a:buNone/>
             </a:pPr>
             <a:br>
-              <a:rPr lang="en-US" sz="2000" b="0" i="0" u="none">
+              <a:rPr lang="en-US" sz="2000" b="0" i="0" u="none" dirty="0">
                 <a:solidFill>
                   <a:srgbClr val="5E5E5E"/>
                 </a:solidFill>
@@ -13114,7 +13074,7 @@
                 <a:sym typeface="Arial"/>
               </a:rPr>
             </a:br>
-            <a:endParaRPr lang="en-US" sz="2000" b="0" i="0" u="none">
+            <a:endParaRPr lang="en-US" sz="2000" b="0" i="0" u="none" dirty="0">
               <a:solidFill>
                 <a:srgbClr val="5E5E5E"/>
               </a:solidFill>
@@ -13137,7 +13097,7 @@
               </a:spcAft>
               <a:buNone/>
             </a:pPr>
-            <a:endParaRPr/>
+            <a:endParaRPr dirty="0"/>
           </a:p>
           <a:p>
             <a:pPr marL="0" marR="0" lvl="0" indent="0" algn="l" rtl="0">
@@ -13152,7 +13112,7 @@
               </a:spcAft>
               <a:buNone/>
             </a:pPr>
-            <a:endParaRPr/>
+            <a:endParaRPr dirty="0"/>
           </a:p>
           <a:p>
             <a:pPr marL="0" marR="0" lvl="0" indent="0" algn="l" rtl="0">
@@ -13167,7 +13127,7 @@
               </a:spcAft>
               <a:buNone/>
             </a:pPr>
-            <a:endParaRPr/>
+            <a:endParaRPr dirty="0"/>
           </a:p>
           <a:p>
             <a:pPr marL="0" marR="0" lvl="0" indent="0" algn="l" rtl="0">
@@ -13182,7 +13142,7 @@
               </a:spcAft>
               <a:buNone/>
             </a:pPr>
-            <a:endParaRPr/>
+            <a:endParaRPr dirty="0"/>
           </a:p>
           <a:p>
             <a:pPr marL="0" marR="0" lvl="0" indent="0" algn="l" rtl="0">
@@ -13198,11 +13158,11 @@
               <a:buNone/>
             </a:pPr>
             <a:r>
-              <a:rPr lang="en-US"/>
+              <a:rPr lang="en-US" dirty="0"/>
               <a:t>The Working Tree</a:t>
             </a:r>
             <a:br>
-              <a:rPr lang="en-US" sz="2000" b="0" i="0" u="none">
+              <a:rPr lang="en-US" sz="2000" b="0" i="0" u="none" dirty="0">
                 <a:solidFill>
                   <a:srgbClr val="5E5E5E"/>
                 </a:solidFill>
@@ -13212,7 +13172,7 @@
                 <a:sym typeface="Arial"/>
               </a:rPr>
             </a:br>
-            <a:endParaRPr lang="en-US" sz="2000" b="0" i="0" u="none">
+            <a:endParaRPr lang="en-US" sz="2000" b="0" i="0" u="none" dirty="0">
               <a:solidFill>
                 <a:srgbClr val="5E5E5E"/>
               </a:solidFill>
@@ -13636,7 +13596,7 @@
               <a:buChar char="•"/>
             </a:pPr>
             <a:r>
-              <a:rPr lang="en-US" sz="2000" b="1" i="0" u="none">
+              <a:rPr lang="en-US" sz="2000" b="1" i="0" u="none" dirty="0">
                 <a:solidFill>
                   <a:srgbClr val="ACACAC"/>
                 </a:solidFill>
@@ -13648,7 +13608,7 @@
               <a:t>Untracked</a:t>
             </a:r>
             <a:r>
-              <a:rPr lang="en-US" sz="2000" b="0" i="0" u="none">
+              <a:rPr lang="en-US" sz="2000" b="0" i="0" u="none" dirty="0">
                 <a:solidFill>
                   <a:srgbClr val="5E5E5E"/>
                 </a:solidFill>
@@ -13673,7 +13633,7 @@
               </a:spcAft>
               <a:buNone/>
             </a:pPr>
-            <a:endParaRPr/>
+            <a:endParaRPr dirty="0"/>
           </a:p>
           <a:p>
             <a:pPr marL="228600" marR="0" lvl="0" indent="-228600" algn="l" rtl="0">
@@ -13694,7 +13654,7 @@
               <a:buChar char="•"/>
             </a:pPr>
             <a:r>
-              <a:rPr lang="en-US" sz="2000" b="1" i="0" u="none">
+              <a:rPr lang="en-US" sz="2000" b="1" i="0" u="none" dirty="0">
                 <a:solidFill>
                   <a:srgbClr val="FF0000"/>
                 </a:solidFill>
@@ -13706,7 +13666,7 @@
               <a:t>Modified</a:t>
             </a:r>
             <a:r>
-              <a:rPr lang="en-US" sz="2000" b="0" i="0" u="none">
+              <a:rPr lang="en-US" sz="2000" b="0" i="0" u="none" dirty="0">
                 <a:solidFill>
                   <a:srgbClr val="5E5E5E"/>
                 </a:solidFill>
@@ -13731,7 +13691,7 @@
               </a:spcAft>
               <a:buNone/>
             </a:pPr>
-            <a:endParaRPr/>
+            <a:endParaRPr dirty="0"/>
           </a:p>
           <a:p>
             <a:pPr marL="228600" marR="0" lvl="0" indent="-228600" algn="l" rtl="0">
@@ -13752,7 +13712,7 @@
               <a:buChar char="•"/>
             </a:pPr>
             <a:r>
-              <a:rPr lang="en-US" sz="2000" b="1" i="0" u="none">
+              <a:rPr lang="en-US" sz="2000" b="1" i="0" u="none" dirty="0">
                 <a:solidFill>
                   <a:srgbClr val="13911F"/>
                 </a:solidFill>
@@ -13764,7 +13724,7 @@
               <a:t>Staged</a:t>
             </a:r>
             <a:r>
-              <a:rPr lang="en-US" sz="2000" b="0" i="0" u="none">
+              <a:rPr lang="en-US" sz="2000" b="0" i="0" u="none" dirty="0">
                 <a:solidFill>
                   <a:srgbClr val="13911F"/>
                 </a:solidFill>
@@ -13776,7 +13736,7 @@
               <a:t> </a:t>
             </a:r>
             <a:r>
-              <a:rPr lang="en-US" sz="2000" b="0" i="0" u="none">
+              <a:rPr lang="en-US" sz="2000" b="0" i="0" u="none" dirty="0">
                 <a:solidFill>
                   <a:srgbClr val="5E5E5E"/>
                 </a:solidFill>
@@ -13801,7 +13761,7 @@
               </a:spcAft>
               <a:buNone/>
             </a:pPr>
-            <a:endParaRPr/>
+            <a:endParaRPr dirty="0"/>
           </a:p>
           <a:p>
             <a:pPr marL="228600" marR="0" lvl="0" indent="-228600" algn="l" rtl="0">
@@ -13822,7 +13782,7 @@
               <a:buChar char="•"/>
             </a:pPr>
             <a:r>
-              <a:rPr lang="en-US" sz="2000" b="1" i="0" u="none">
+              <a:rPr lang="en-US" sz="2000" b="1" i="0" u="none" dirty="0">
                 <a:solidFill>
                   <a:srgbClr val="002060"/>
                 </a:solidFill>
@@ -13834,7 +13794,7 @@
               <a:t>Committed</a:t>
             </a:r>
             <a:r>
-              <a:rPr lang="en-US" sz="2000" b="0" i="0" u="none">
+              <a:rPr lang="en-US" sz="2000" b="0" i="0" u="none" dirty="0">
                 <a:solidFill>
                   <a:srgbClr val="5E5E5E"/>
                 </a:solidFill>
@@ -14534,7 +14494,7 @@
               <a:buNone/>
             </a:pPr>
             <a:r>
-              <a:rPr lang="en-US" sz="2000" b="0" i="0" u="none">
+              <a:rPr lang="en-US" sz="2000" b="0" i="0" u="none" dirty="0">
                 <a:solidFill>
                   <a:srgbClr val="5E5E5E"/>
                 </a:solidFill>
@@ -14543,14 +14503,14 @@
                 <a:cs typeface="Arial"/>
                 <a:sym typeface="Arial"/>
               </a:rPr>
-              <a:t>Almost all of GIT is built around manipulating this simple structure of four different object types. It is sort of </a:t>
-            </a:r>
-            <a:r>
-              <a:rPr lang="en-US"/>
+              <a:t>Almost all the GIT is built around manipulating this simple structure of four different object types. It is sort of </a:t>
+            </a:r>
+            <a:r>
+              <a:rPr lang="en-US" dirty="0"/>
               <a:t>it's</a:t>
             </a:r>
             <a:r>
-              <a:rPr lang="en-US" sz="2000" b="0" i="0" u="none">
+              <a:rPr lang="en-US" sz="2000" b="0" i="0" u="none" dirty="0">
                 <a:solidFill>
                   <a:srgbClr val="5E5E5E"/>
                 </a:solidFill>
@@ -14581,11 +14541,11 @@
               <a:buNone/>
             </a:pPr>
             <a:r>
-              <a:rPr lang="en-US"/>
+              <a:rPr lang="en-US" dirty="0"/>
               <a:t>Let's</a:t>
             </a:r>
             <a:r>
-              <a:rPr lang="en-US" sz="2000" b="0" i="0" u="none">
+              <a:rPr lang="en-US" sz="2000" b="0" i="0" u="none" dirty="0">
                 <a:solidFill>
                   <a:srgbClr val="5E5E5E"/>
                 </a:solidFill>
@@ -14615,7 +14575,7 @@
               <a:buFont typeface="Arial"/>
               <a:buNone/>
             </a:pPr>
-            <a:endParaRPr sz="2000" b="0" i="0" u="none">
+            <a:endParaRPr sz="2000" b="0" i="0" u="none" dirty="0">
               <a:solidFill>
                 <a:srgbClr val="5E5E5E"/>
               </a:solidFill>
@@ -14643,7 +14603,7 @@
               <a:buFont typeface="Arial"/>
               <a:buNone/>
             </a:pPr>
-            <a:endParaRPr sz="2000" b="0" i="0" u="none">
+            <a:endParaRPr sz="2000" b="0" i="0" u="none" dirty="0">
               <a:solidFill>
                 <a:srgbClr val="5E5E5E"/>
               </a:solidFill>
@@ -14671,7 +14631,7 @@
               <a:buFont typeface="Arial"/>
               <a:buNone/>
             </a:pPr>
-            <a:endParaRPr sz="2000" b="0" i="0" u="none">
+            <a:endParaRPr sz="2000" b="0" i="0" u="none" dirty="0">
               <a:solidFill>
                 <a:srgbClr val="5E5E5E"/>
               </a:solidFill>
@@ -14699,7 +14659,7 @@
               <a:buFont typeface="Arial"/>
               <a:buNone/>
             </a:pPr>
-            <a:endParaRPr sz="2000" b="0" i="0" u="none">
+            <a:endParaRPr sz="2000" b="0" i="0" u="none" dirty="0">
               <a:solidFill>
                 <a:srgbClr val="5E5E5E"/>
               </a:solidFill>
@@ -14727,7 +14687,7 @@
               <a:buFont typeface="Arial"/>
               <a:buNone/>
             </a:pPr>
-            <a:endParaRPr sz="2000" b="0" i="0" u="none">
+            <a:endParaRPr sz="2000" b="0" i="0" u="none" dirty="0">
               <a:solidFill>
                 <a:srgbClr val="5E5E5E"/>
               </a:solidFill>
@@ -14755,7 +14715,7 @@
               <a:buFont typeface="Arial"/>
               <a:buNone/>
             </a:pPr>
-            <a:endParaRPr sz="2000" b="0" i="0" u="none">
+            <a:endParaRPr sz="2000" b="0" i="0" u="none" dirty="0">
               <a:solidFill>
                 <a:srgbClr val="5E5E5E"/>
               </a:solidFill>
@@ -14783,7 +14743,7 @@
               <a:buFont typeface="Arial"/>
               <a:buNone/>
             </a:pPr>
-            <a:endParaRPr sz="2000" b="0" i="0" u="none">
+            <a:endParaRPr sz="2000" b="0" i="0" u="none" dirty="0">
               <a:solidFill>
                 <a:srgbClr val="5E5E5E"/>
               </a:solidFill>
@@ -14812,7 +14772,7 @@
               <a:buNone/>
             </a:pPr>
             <a:r>
-              <a:rPr lang="en-US" sz="2000" b="0" i="0" u="none">
+              <a:rPr lang="en-US" sz="2000" b="0" i="0" u="none" dirty="0">
                 <a:solidFill>
                   <a:srgbClr val="5E5E5E"/>
                 </a:solidFill>
@@ -14842,7 +14802,7 @@
               <a:buFont typeface="Arial"/>
               <a:buNone/>
             </a:pPr>
-            <a:endParaRPr sz="2000" b="0" i="0" u="none">
+            <a:endParaRPr sz="2000" b="0" i="0" u="none" dirty="0">
               <a:solidFill>
                 <a:srgbClr val="5E5E5E"/>
               </a:solidFill>
@@ -14870,7 +14830,7 @@
               <a:buFont typeface="Arial"/>
               <a:buNone/>
             </a:pPr>
-            <a:endParaRPr sz="2000" b="0" i="0" u="none">
+            <a:endParaRPr sz="2000" b="0" i="0" u="none" dirty="0">
               <a:solidFill>
                 <a:srgbClr val="5E5E5E"/>
               </a:solidFill>
@@ -14895,7 +14855,7 @@
               <a:buFont typeface="Arial"/>
               <a:buNone/>
             </a:pPr>
-            <a:endParaRPr sz="2000" b="0" i="0" u="none">
+            <a:endParaRPr sz="2000" b="0" i="0" u="none" dirty="0">
               <a:solidFill>
                 <a:srgbClr val="5E5E5E"/>
               </a:solidFill>
@@ -15231,7 +15191,7 @@
               <a:buNone/>
             </a:pPr>
             <a:r>
-              <a:rPr lang="en-US"/>
+              <a:rPr lang="en-US" dirty="0"/>
               <a:t>Commit object with its parent</a:t>
             </a:r>
           </a:p>
@@ -15247,7 +15207,7 @@
               <a:buChar char="●"/>
             </a:pPr>
             <a:r>
-              <a:rPr lang="en-US" sz="2400"/>
+              <a:rPr lang="en-US" sz="2400" dirty="0"/>
               <a:t>Links from tree object to common blobs</a:t>
             </a:r>
           </a:p>
@@ -15357,7 +15317,7 @@
               <a:buNone/>
             </a:pPr>
             <a:r>
-              <a:rPr lang="en-US" sz="1800"/>
+              <a:rPr lang="en-US" sz="1800" dirty="0"/>
               <a:t>Commit Obj</a:t>
             </a:r>
           </a:p>
@@ -15572,7 +15532,7 @@
               <a:buChar char="•"/>
             </a:pPr>
             <a:r>
-              <a:rPr lang="en-US" sz="2000" b="0" i="0" u="none">
+              <a:rPr lang="en-US" sz="2000" b="0" i="0" u="none" dirty="0">
                 <a:solidFill>
                   <a:srgbClr val="5E5E5E"/>
                 </a:solidFill>
@@ -15603,7 +15563,7 @@
               <a:buNone/>
             </a:pPr>
             <a:r>
-              <a:rPr lang="en-US" sz="2000" b="0" i="0" u="none">
+              <a:rPr lang="en-US" sz="2000" b="0" i="0" u="none" dirty="0">
                 <a:solidFill>
                   <a:srgbClr val="5E5E5E"/>
                 </a:solidFill>
@@ -15634,7 +15594,7 @@
               <a:buNone/>
             </a:pPr>
             <a:r>
-              <a:rPr lang="en-US" sz="2000" b="0" i="0" u="none">
+              <a:rPr lang="en-US" sz="2000" b="0" i="0" u="none" dirty="0">
                 <a:solidFill>
                   <a:srgbClr val="5E5E5E"/>
                 </a:solidFill>
@@ -15662,17 +15622,17 @@
               <a:buNone/>
             </a:pPr>
             <a:br>
-              <a:rPr lang="en-US"/>
+              <a:rPr lang="en-US" dirty="0"/>
             </a:br>
             <a:r>
-              <a:rPr lang="en-US"/>
+              <a:rPr lang="en-US" dirty="0"/>
               <a:t>Each commit has </a:t>
             </a:r>
             <a:br>
-              <a:rPr lang="en-US"/>
+              <a:rPr lang="en-US" dirty="0"/>
             </a:br>
             <a:r>
-              <a:rPr lang="en-US"/>
+              <a:rPr lang="en-US" dirty="0"/>
               <a:t>Author and Committer</a:t>
             </a:r>
           </a:p>
@@ -15692,25 +15652,25 @@
               <a:buNone/>
             </a:pPr>
             <a:r>
-              <a:rPr lang="en-US" b="1"/>
-              <a:t>Author</a:t>
-            </a:r>
-            <a:r>
-              <a:rPr lang="en-US"/>
+              <a:rPr lang="en-US" b="1" dirty="0"/>
+              <a:t>The Author</a:t>
+            </a:r>
+            <a:r>
+              <a:rPr lang="en-US" dirty="0"/>
               <a:t> is who really </a:t>
             </a:r>
             <a:br>
-              <a:rPr lang="en-US"/>
+              <a:rPr lang="en-US" dirty="0"/>
             </a:br>
             <a:r>
-              <a:rPr lang="en-US"/>
-              <a:t>wrote the code and </a:t>
+              <a:rPr lang="en-US" dirty="0"/>
+              <a:t>wrote the code, and </a:t>
             </a:r>
             <a:br>
-              <a:rPr lang="en-US"/>
+              <a:rPr lang="en-US" dirty="0"/>
             </a:br>
             <a:r>
-              <a:rPr lang="en-US"/>
+              <a:rPr lang="en-US" dirty="0"/>
               <a:t>committed</a:t>
             </a:r>
           </a:p>
@@ -15730,32 +15690,32 @@
               <a:buNone/>
             </a:pPr>
             <a:r>
-              <a:rPr lang="en-US" b="1"/>
+              <a:rPr lang="en-US" b="1" dirty="0"/>
               <a:t>Committer</a:t>
             </a:r>
             <a:r>
-              <a:rPr lang="en-US"/>
+              <a:rPr lang="en-US" dirty="0"/>
               <a:t>, if not the </a:t>
             </a:r>
             <a:br>
-              <a:rPr lang="en-US"/>
+              <a:rPr lang="en-US" dirty="0"/>
             </a:br>
             <a:r>
-              <a:rPr lang="en-US"/>
-              <a:t>same as Author, took </a:t>
+              <a:rPr lang="en-US" dirty="0"/>
+              <a:t>same as the Author, took </a:t>
             </a:r>
             <a:br>
-              <a:rPr lang="en-US"/>
+              <a:rPr lang="en-US" dirty="0"/>
             </a:br>
             <a:r>
-              <a:rPr lang="en-US"/>
+              <a:rPr lang="en-US" dirty="0"/>
               <a:t>Original commit and</a:t>
             </a:r>
             <a:br>
-              <a:rPr lang="en-US"/>
+              <a:rPr lang="en-US" dirty="0"/>
             </a:br>
             <a:r>
-              <a:rPr lang="en-US"/>
+              <a:rPr lang="en-US" dirty="0"/>
               <a:t>reused it in his branch </a:t>
             </a:r>
           </a:p>
@@ -16602,7 +16562,7 @@
               <a:buNone/>
             </a:pPr>
             <a:r>
-              <a:rPr lang="en-US" sz="3600"/>
+              <a:rPr lang="en-US" sz="3600" dirty="0"/>
               <a:t>Demo</a:t>
             </a:r>
           </a:p>
@@ -16614,13 +16574,13 @@
               <a:buNone/>
             </a:pPr>
             <a:r>
-              <a:rPr lang="en-US" sz="3600"/>
+              <a:rPr lang="en-US" sz="3600" dirty="0"/>
               <a:t>Lab 3</a:t>
             </a:r>
             <a:br>
-              <a:rPr lang="en-US" sz="3600"/>
+              <a:rPr lang="en-US" sz="3600" dirty="0"/>
             </a:br>
-            <a:endParaRPr lang="en-US" sz="3600"/>
+            <a:endParaRPr lang="en-US" sz="3600" dirty="0"/>
           </a:p>
           <a:p>
             <a:pPr marL="0" lvl="0" indent="0" rtl="0">
@@ -16630,7 +16590,7 @@
               <a:buNone/>
             </a:pPr>
             <a:r>
-              <a:rPr lang="en-US" sz="3000"/>
+              <a:rPr lang="en-US" sz="3000" dirty="0"/>
               <a:t>Teamwork, parallel work: </a:t>
             </a:r>
           </a:p>
@@ -16642,8 +16602,8 @@
               <a:buSzPct val="100000"/>
             </a:pPr>
             <a:r>
-              <a:rPr lang="en-US" sz="3000"/>
-              <a:t>We will clone second work repo2</a:t>
+              <a:rPr lang="en-US" sz="3000" dirty="0"/>
+              <a:t>We will clone the second work repository2</a:t>
             </a:r>
           </a:p>
           <a:p>
@@ -16654,8 +16614,8 @@
               <a:buSzPct val="100000"/>
             </a:pPr>
             <a:r>
-              <a:rPr lang="en-US" sz="3000"/>
-              <a:t>Will commit changes in both repositories</a:t>
+              <a:rPr lang="en-US" sz="3000" dirty="0"/>
+              <a:t>We will commit changes in both repositories</a:t>
             </a:r>
           </a:p>
           <a:p>
@@ -16666,7 +16626,7 @@
               <a:buSzPct val="100000"/>
             </a:pPr>
             <a:r>
-              <a:rPr lang="en-US" sz="3000"/>
+              <a:rPr lang="en-US" sz="3000" dirty="0"/>
               <a:t>Push and pull with silent rebase to apply the commit of one repo into another</a:t>
             </a:r>
           </a:p>
@@ -16678,7 +16638,7 @@
               <a:buSzPct val="100000"/>
             </a:pPr>
             <a:r>
-              <a:rPr lang="en-US" sz="3000"/>
+              <a:rPr lang="en-US" sz="3000" dirty="0"/>
               <a:t>Overview results </a:t>
             </a:r>
           </a:p>
@@ -28897,7 +28857,7 @@
               <a:buFont typeface="Arial"/>
               <a:buNone/>
             </a:pPr>
-            <a:endParaRPr sz="1800" b="1" i="0" u="none">
+            <a:endParaRPr sz="1800" b="1" i="0" u="none" dirty="0">
               <a:solidFill>
                 <a:srgbClr val="5E5E5E"/>
               </a:solidFill>
@@ -28925,7 +28885,7 @@
               <a:buFont typeface="Arial"/>
               <a:buNone/>
             </a:pPr>
-            <a:endParaRPr sz="1800" b="1" i="0" u="none">
+            <a:endParaRPr sz="1800" b="1" i="0" u="none" dirty="0">
               <a:solidFill>
                 <a:srgbClr val="5E5E5E"/>
               </a:solidFill>
@@ -28954,7 +28914,7 @@
               <a:buChar char="•"/>
             </a:pPr>
             <a:r>
-              <a:rPr lang="en-US" sz="2000" b="1" i="0" u="none">
+              <a:rPr lang="en-US" sz="2000" b="1" i="0" u="none" dirty="0">
                 <a:solidFill>
                   <a:srgbClr val="5E5E5E"/>
                 </a:solidFill>
@@ -28985,7 +28945,7 @@
               <a:buNone/>
             </a:pPr>
             <a:r>
-              <a:rPr lang="en-US" sz="1800" b="0" i="0" u="none">
+              <a:rPr lang="en-US" sz="1800" b="0" i="0" u="none" dirty="0">
                 <a:solidFill>
                   <a:srgbClr val="000000"/>
                 </a:solidFill>
@@ -29015,7 +28975,7 @@
               <a:buFont typeface="Arial"/>
               <a:buNone/>
             </a:pPr>
-            <a:endParaRPr sz="1800" b="1" i="0" u="none">
+            <a:endParaRPr sz="1800" b="1" i="0" u="none" dirty="0">
               <a:solidFill>
                 <a:srgbClr val="0070C0"/>
               </a:solidFill>
@@ -29043,7 +29003,7 @@
               <a:buFont typeface="Arial"/>
               <a:buNone/>
             </a:pPr>
-            <a:endParaRPr sz="1800" b="1" i="0" u="none">
+            <a:endParaRPr sz="1800" b="1" i="0" u="none" dirty="0">
               <a:solidFill>
                 <a:srgbClr val="0070C0"/>
               </a:solidFill>
@@ -29068,7 +29028,7 @@
               <a:buFont typeface="Arial"/>
               <a:buNone/>
             </a:pPr>
-            <a:endParaRPr sz="1800" b="1" i="0" u="none">
+            <a:endParaRPr sz="1800" b="1" i="0" u="none" dirty="0">
               <a:solidFill>
                 <a:srgbClr val="0070C0"/>
               </a:solidFill>
@@ -29321,7 +29281,7 @@
               <a:buNone/>
             </a:pPr>
             <a:r>
-              <a:rPr lang="en-US" sz="3600"/>
+              <a:rPr lang="en-US" sz="3600" dirty="0"/>
               <a:t>Demo</a:t>
             </a:r>
           </a:p>
@@ -29333,13 +29293,13 @@
               <a:buNone/>
             </a:pPr>
             <a:r>
-              <a:rPr lang="en-US" sz="3600"/>
+              <a:rPr lang="en-US" sz="3600" dirty="0"/>
               <a:t>Lab 4</a:t>
             </a:r>
             <a:br>
-              <a:rPr lang="en-US" sz="3600"/>
+              <a:rPr lang="en-US" sz="3600" dirty="0"/>
             </a:br>
-            <a:endParaRPr lang="en-US" sz="3600"/>
+            <a:endParaRPr lang="en-US" sz="3600" dirty="0"/>
           </a:p>
           <a:p>
             <a:pPr marL="457200" lvl="0" indent="-419100" rtl="0">
@@ -29349,8 +29309,8 @@
               <a:buSzPct val="100000"/>
             </a:pPr>
             <a:r>
-              <a:rPr lang="en-US" sz="3000"/>
-              <a:t>Teamwork, parallel work with rebase and conflicts resolution: </a:t>
+              <a:rPr lang="en-US" sz="3000" dirty="0"/>
+              <a:t>Teamwork, parallel work with rebase, and conflict resolution: </a:t>
             </a:r>
           </a:p>
           <a:p>
@@ -29361,8 +29321,8 @@
               <a:buSzPct val="100000"/>
             </a:pPr>
             <a:r>
-              <a:rPr lang="en-US" sz="3000"/>
-              <a:t>We will do commits in both repos, with change in the same line of the same file</a:t>
+              <a:rPr lang="en-US" sz="3000" dirty="0"/>
+              <a:t>We will do commits in both repositories, with changes in the same line of the same file</a:t>
             </a:r>
           </a:p>
           <a:p>
@@ -29373,8 +29333,8 @@
               <a:buSzPct val="100000"/>
             </a:pPr>
             <a:r>
-              <a:rPr lang="en-US" sz="3000"/>
-              <a:t>Pull with rebase, resolve conflicts, save the resolution file</a:t>
+              <a:rPr lang="en-US" sz="3000" dirty="0"/>
+              <a:t>Pull with rebase, resolve conflicts, and save the resolution file</a:t>
             </a:r>
           </a:p>
           <a:p>
@@ -29385,8 +29345,8 @@
               <a:buSzPct val="100000"/>
             </a:pPr>
             <a:r>
-              <a:rPr lang="en-US" sz="3000"/>
-              <a:t>Add the file to the staging area - means resolve.</a:t>
+              <a:rPr lang="en-US" sz="3000" dirty="0"/>
+              <a:t>Adding the file to the staging area means resolving the issue.</a:t>
             </a:r>
           </a:p>
           <a:p>
@@ -29397,7 +29357,7 @@
               <a:buSzPct val="100000"/>
             </a:pPr>
             <a:r>
-              <a:rPr lang="en-US" sz="3000"/>
+              <a:rPr lang="en-US" sz="3000" dirty="0"/>
               <a:t>Commit and push</a:t>
             </a:r>
           </a:p>
@@ -32201,7 +32161,7 @@
               <a:buNone/>
             </a:pPr>
             <a:r>
-              <a:rPr lang="en-US" sz="3600"/>
+              <a:rPr lang="en-US" sz="3600" dirty="0"/>
               <a:t>Demo</a:t>
             </a:r>
           </a:p>
@@ -32213,13 +32173,13 @@
               <a:buNone/>
             </a:pPr>
             <a:r>
-              <a:rPr lang="en-US" sz="3600"/>
+              <a:rPr lang="en-US" sz="3600" dirty="0"/>
               <a:t>Lab 5 - 7</a:t>
             </a:r>
             <a:br>
-              <a:rPr lang="en-US" sz="3600"/>
+              <a:rPr lang="en-US" sz="3600" dirty="0"/>
             </a:br>
-            <a:endParaRPr lang="en-US" sz="3600"/>
+            <a:endParaRPr lang="en-US" sz="3600" dirty="0"/>
           </a:p>
           <a:p>
             <a:pPr marL="457200" lvl="0" indent="-419100" rtl="0">
@@ -32229,8 +32189,8 @@
               <a:buSzPct val="100000"/>
             </a:pPr>
             <a:r>
-              <a:rPr lang="en-US" sz="3000"/>
-              <a:t>We will create tag</a:t>
+              <a:rPr lang="en-US" sz="3000" dirty="0"/>
+              <a:t>We will create a tag</a:t>
             </a:r>
           </a:p>
           <a:p>
@@ -32241,7 +32201,7 @@
               <a:buSzPct val="100000"/>
             </a:pPr>
             <a:r>
-              <a:rPr lang="en-US" sz="3000"/>
+              <a:rPr lang="en-US" sz="3000" dirty="0"/>
               <a:t>Create branch bugfix from the tag</a:t>
             </a:r>
           </a:p>
@@ -32253,8 +32213,8 @@
               <a:buNone/>
             </a:pPr>
             <a:r>
-              <a:rPr lang="en-US" sz="3000"/>
-              <a:t>Will do bugfix commit in bugfix branch</a:t>
+              <a:rPr lang="en-US" sz="3000" dirty="0"/>
+              <a:t>I will do a bugfix commit in the bugfix branch</a:t>
             </a:r>
           </a:p>
           <a:p>
@@ -32265,8 +32225,8 @@
               <a:buNone/>
             </a:pPr>
             <a:r>
-              <a:rPr lang="en-US" sz="3000"/>
-              <a:t>Check out master branch and commit new change</a:t>
+              <a:rPr lang="en-US" sz="3000" dirty="0"/>
+              <a:t>Check out the master branch and commit a new change</a:t>
             </a:r>
           </a:p>
           <a:p>
@@ -32277,7 +32237,7 @@
               <a:buSzPct val="100000"/>
             </a:pPr>
             <a:r>
-              <a:rPr lang="en-US" sz="3000"/>
+              <a:rPr lang="en-US" sz="3000" dirty="0"/>
               <a:t>Merge bugfix branch</a:t>
             </a:r>
           </a:p>
@@ -32289,7 +32249,7 @@
               <a:buNone/>
             </a:pPr>
             <a:r>
-              <a:rPr lang="en-US" sz="3000"/>
+              <a:rPr lang="en-US" sz="3000" dirty="0"/>
               <a:t>Overview results</a:t>
             </a:r>
           </a:p>
@@ -33420,7 +33380,7 @@
               <a:buNone/>
             </a:pPr>
             <a:r>
-              <a:rPr lang="en-US" sz="2000" b="0" i="0" u="none" strike="noStrike" cap="none">
+              <a:rPr lang="en-US" sz="2000" b="0" i="0" u="none" strike="noStrike" cap="none" dirty="0">
                 <a:solidFill>
                   <a:srgbClr val="5E5E5E"/>
                 </a:solidFill>
@@ -33445,7 +33405,7 @@
               <a:buChar char="–"/>
             </a:pPr>
             <a:r>
-              <a:rPr lang="en-US"/>
+              <a:rPr lang="en-US" dirty="0"/>
               <a:t>Git Architecture, data model</a:t>
             </a:r>
           </a:p>
@@ -33462,7 +33422,7 @@
               <a:buChar char="–"/>
             </a:pPr>
             <a:r>
-              <a:rPr lang="en-US"/>
+              <a:rPr lang="en-US" dirty="0"/>
               <a:t>DVCS, Repository, Commit, Parent Commit, Tree, Blob, Index.</a:t>
             </a:r>
           </a:p>
@@ -33479,8 +33439,8 @@
               <a:buChar char="–"/>
             </a:pPr>
             <a:r>
-              <a:rPr lang="en-US"/>
-              <a:t>Staged, Modified, Committed files.</a:t>
+              <a:rPr lang="en-US" dirty="0"/>
+              <a:t>Staged, Modified, and Committed files.</a:t>
             </a:r>
           </a:p>
           <a:p>
@@ -33496,8 +33456,8 @@
               <a:buChar char="–"/>
             </a:pPr>
             <a:r>
-              <a:rPr lang="en-US"/>
-              <a:t>Basic commands to work in Repository and outside.</a:t>
+              <a:rPr lang="en-US" dirty="0"/>
+              <a:t>Basic commands to work in the Repository and outside.</a:t>
             </a:r>
           </a:p>
           <a:p>
@@ -33513,7 +33473,7 @@
               <a:buChar char="–"/>
             </a:pPr>
             <a:r>
-              <a:rPr lang="en-US"/>
+              <a:rPr lang="en-US" dirty="0"/>
               <a:t>Sharing work with peers.</a:t>
             </a:r>
           </a:p>
@@ -33530,7 +33490,7 @@
               <a:buChar char="–"/>
             </a:pPr>
             <a:r>
-              <a:rPr lang="en-US"/>
+              <a:rPr lang="en-US" dirty="0"/>
               <a:t>Best practices</a:t>
             </a:r>
           </a:p>
@@ -33552,7 +33512,7 @@
               <a:buFont typeface="Arial"/>
               <a:buNone/>
             </a:pPr>
-            <a:endParaRPr sz="2000" b="0" i="0" u="none" strike="noStrike" cap="none">
+            <a:endParaRPr sz="2000" b="0" i="0" u="none" strike="noStrike" cap="none" dirty="0">
               <a:solidFill>
                 <a:srgbClr val="5E5E5E"/>
               </a:solidFill>
@@ -33581,7 +33541,7 @@
               <a:buNone/>
             </a:pPr>
             <a:r>
-              <a:rPr lang="en-US" sz="2000" b="0" i="0" u="none" strike="noStrike" cap="none">
+              <a:rPr lang="en-US" sz="2000" b="0" i="0" u="none" strike="noStrike" cap="none" dirty="0">
                 <a:solidFill>
                   <a:srgbClr val="5E5E5E"/>
                 </a:solidFill>
@@ -34410,7 +34370,7 @@
               <a:buNone/>
             </a:pPr>
             <a:r>
-              <a:rPr lang="en-US" sz="3600"/>
+              <a:rPr lang="en-US" sz="3600" dirty="0"/>
               <a:t>Lab 8 - 10</a:t>
             </a:r>
           </a:p>
@@ -34421,7 +34381,7 @@
               </a:spcBef>
               <a:buNone/>
             </a:pPr>
-            <a:endParaRPr sz="3000"/>
+            <a:endParaRPr sz="3000" dirty="0"/>
           </a:p>
           <a:p>
             <a:pPr marL="457200" lvl="0" indent="-419100" algn="l" rtl="0">
@@ -34431,7 +34391,7 @@
               <a:buSzPct val="100000"/>
             </a:pPr>
             <a:r>
-              <a:rPr lang="en-US" sz="3000"/>
+              <a:rPr lang="en-US" sz="3000" dirty="0"/>
               <a:t>We will create branch bugfix2, from Release_01</a:t>
             </a:r>
           </a:p>
@@ -34443,8 +34403,8 @@
               <a:buNone/>
             </a:pPr>
             <a:r>
-              <a:rPr lang="en-US" sz="3000"/>
-              <a:t>Cherry-pick 1 commit from master branch</a:t>
+              <a:rPr lang="en-US" sz="3000" dirty="0"/>
+              <a:t>Cherry-pick 1 commit from the master branch</a:t>
             </a:r>
           </a:p>
           <a:p>
@@ -34455,7 +34415,7 @@
               <a:buSzPct val="100000"/>
             </a:pPr>
             <a:r>
-              <a:rPr lang="en-US" sz="3000"/>
+              <a:rPr lang="en-US" sz="3000" dirty="0"/>
               <a:t>Undo modified file, undo staged file</a:t>
             </a:r>
           </a:p>
@@ -34467,8 +34427,8 @@
               <a:buNone/>
             </a:pPr>
             <a:r>
-              <a:rPr lang="en-US" sz="3000"/>
-              <a:t>Undo latest local commit, revert pushed commit</a:t>
+              <a:rPr lang="en-US" sz="3000" dirty="0"/>
+              <a:t>Undo the latest local commit, revert the pushed commit</a:t>
             </a:r>
           </a:p>
           <a:p>
@@ -34479,8 +34439,8 @@
               <a:buSzPct val="100000"/>
             </a:pPr>
             <a:r>
-              <a:rPr lang="en-US" sz="3000"/>
-              <a:t>Stash meanwhile work aside, make commit, return work from stash</a:t>
+              <a:rPr lang="en-US" sz="3000" dirty="0"/>
+              <a:t>Stash meanwhile work aside, make a commit, return work from stash</a:t>
             </a:r>
           </a:p>
         </p:txBody>
@@ -34586,13 +34546,13 @@
               <a:buNone/>
             </a:pPr>
             <a:r>
-              <a:rPr lang="en-US" sz="3600"/>
+              <a:rPr lang="en-US" sz="3600" dirty="0"/>
               <a:t>Lab 11 - 13</a:t>
             </a:r>
             <a:br>
-              <a:rPr lang="en-US" sz="3600"/>
+              <a:rPr lang="en-US" sz="3600" dirty="0"/>
             </a:br>
-            <a:endParaRPr lang="en-US" sz="3600"/>
+            <a:endParaRPr lang="en-US" sz="3600" dirty="0"/>
           </a:p>
           <a:p>
             <a:pPr marL="457200" lvl="0" indent="-419100" rtl="0">
@@ -34602,7 +34562,7 @@
               <a:buSzPct val="100000"/>
             </a:pPr>
             <a:r>
-              <a:rPr lang="en-US" sz="3000"/>
+              <a:rPr lang="en-US" sz="3000" dirty="0"/>
               <a:t>Format patch in 1 repository, and apply it in another repository	</a:t>
             </a:r>
           </a:p>
@@ -34614,8 +34574,8 @@
               <a:buSzPct val="100000"/>
             </a:pPr>
             <a:r>
-              <a:rPr lang="en-US" sz="3000"/>
-              <a:t>We will create 2 local commits and squash them to 1 commit by interactive rebase, and push only 1 commit to remote repository  </a:t>
+              <a:rPr lang="en-US" sz="3000" dirty="0"/>
+              <a:t>We will create 2 local commits squash them to 1 commit by interactive rebase, and push only 1 commit to the remote repository  </a:t>
             </a:r>
           </a:p>
           <a:p>
@@ -34626,8 +34586,8 @@
               <a:buSzPct val="100000"/>
             </a:pPr>
             <a:r>
-              <a:rPr lang="en-US" sz="3000"/>
-              <a:t>Create commit in 1 repository and pull it from another repository, without pushing to origin repository</a:t>
+              <a:rPr lang="en-US" sz="3000" dirty="0"/>
+              <a:t>Create a commit in 1 repository and pull it from another repository, without pushing it to the origin repository</a:t>
             </a:r>
           </a:p>
         </p:txBody>
@@ -35453,7 +35413,7 @@
               <a:buChar char="•"/>
             </a:pPr>
             <a:r>
-              <a:rPr lang="en-US" sz="2000" b="0" i="0" u="none">
+              <a:rPr lang="en-US" sz="2000" b="0" i="0" u="none" dirty="0">
                 <a:solidFill>
                   <a:srgbClr val="5E5E5E"/>
                 </a:solidFill>
@@ -35484,7 +35444,7 @@
               <a:buChar char="•"/>
             </a:pPr>
             <a:r>
-              <a:rPr lang="en-US" sz="2000" b="0" i="0" u="none">
+              <a:rPr lang="en-US" sz="2000" b="0" i="0" u="none" dirty="0">
                 <a:solidFill>
                   <a:srgbClr val="5E5E5E"/>
                 </a:solidFill>
@@ -35515,7 +35475,7 @@
               <a:buChar char="•"/>
             </a:pPr>
             <a:r>
-              <a:rPr lang="en-US" sz="2000" b="0" i="0" u="none">
+              <a:rPr lang="en-US" sz="2000" b="0" i="0" u="none" dirty="0">
                 <a:solidFill>
                   <a:srgbClr val="5E5E5E"/>
                 </a:solidFill>
@@ -35527,7 +35487,7 @@
               <a:t>Atomic transactions, commit, </a:t>
             </a:r>
             <a:r>
-              <a:rPr lang="en-US"/>
+              <a:rPr lang="en-US" dirty="0"/>
               <a:t>cross repository</a:t>
             </a:r>
           </a:p>
@@ -35550,7 +35510,7 @@
               <a:buChar char="•"/>
             </a:pPr>
             <a:r>
-              <a:rPr lang="en-US"/>
+              <a:rPr lang="en-US" dirty="0"/>
               <a:t>Commits (Change) management</a:t>
             </a:r>
           </a:p>
@@ -35573,7 +35533,7 @@
               <a:buChar char="•"/>
             </a:pPr>
             <a:r>
-              <a:rPr lang="en-US" sz="2000" b="0" i="0" u="none">
+              <a:rPr lang="en-US" sz="2000" b="0" i="0" u="none" dirty="0">
                 <a:solidFill>
                   <a:srgbClr val="5E5E5E"/>
                 </a:solidFill>
@@ -35585,11 +35545,11 @@
               <a:t>A clea</a:t>
             </a:r>
             <a:r>
-              <a:rPr lang="en-US"/>
+              <a:rPr lang="en-US" dirty="0"/>
               <a:t>r</a:t>
             </a:r>
             <a:r>
-              <a:rPr lang="en-US" sz="2000" b="0" i="0" u="none">
+              <a:rPr lang="en-US" sz="2000" b="0" i="0" u="none" dirty="0">
                 <a:solidFill>
                   <a:srgbClr val="5E5E5E"/>
                 </a:solidFill>
@@ -35620,7 +35580,7 @@
               <a:buChar char="•"/>
             </a:pPr>
             <a:r>
-              <a:rPr lang="en-US" sz="2000" b="0" i="0" u="none">
+              <a:rPr lang="en-US" sz="2000" b="0" i="0" u="none" dirty="0">
                 <a:solidFill>
                   <a:srgbClr val="5E5E5E"/>
                 </a:solidFill>
@@ -35632,7 +35592,7 @@
               <a:t>Suited to</a:t>
             </a:r>
             <a:r>
-              <a:rPr lang="en-US"/>
+              <a:rPr lang="en-US" dirty="0"/>
               <a:t> handle everything from small to very large projects with speed and efficiency</a:t>
             </a:r>
           </a:p>
@@ -35655,7 +35615,7 @@
               <a:buChar char="•"/>
             </a:pPr>
             <a:r>
-              <a:rPr lang="en-US" sz="2000" b="0" i="0" u="none">
+              <a:rPr lang="en-US" sz="2000" b="0" i="0" u="none" dirty="0">
                 <a:solidFill>
                   <a:srgbClr val="5E5E5E"/>
                 </a:solidFill>
@@ -35682,7 +35642,7 @@
               <a:buFont typeface="Arial"/>
               <a:buNone/>
             </a:pPr>
-            <a:endParaRPr sz="2000" b="0" i="0" u="none">
+            <a:endParaRPr sz="2000" b="0" i="0" u="none" dirty="0">
               <a:solidFill>
                 <a:srgbClr val="5E5E5E"/>
               </a:solidFill>
@@ -36463,7 +36423,7 @@
               <a:buChar char="•"/>
             </a:pPr>
             <a:r>
-              <a:rPr lang="en-US" sz="2000" b="0" i="0" u="none">
+              <a:rPr lang="en-US" sz="2000" b="0" i="0" u="none" dirty="0">
                 <a:solidFill>
                   <a:srgbClr val="5E5E5E"/>
                 </a:solidFill>
@@ -36475,7 +36435,7 @@
               <a:t>The combination of these branches defines a relationship</a:t>
             </a:r>
             <a:br>
-              <a:rPr lang="en-US" sz="2000" b="0" i="0" u="none">
+              <a:rPr lang="en-US" sz="2000" b="0" i="0" u="none" dirty="0">
                 <a:solidFill>
                   <a:srgbClr val="5E5E5E"/>
                 </a:solidFill>
@@ -36486,7 +36446,7 @@
               </a:rPr>
             </a:br>
             <a:r>
-              <a:rPr lang="en-US" sz="2000" b="0" i="0" u="none">
+              <a:rPr lang="en-US" sz="2000" b="0" i="0" u="none" dirty="0">
                 <a:solidFill>
                   <a:srgbClr val="5E5E5E"/>
                 </a:solidFill>
@@ -36517,7 +36477,7 @@
               <a:buChar char="•"/>
             </a:pPr>
             <a:r>
-              <a:rPr lang="en-US" sz="2000" b="0" i="0" u="none">
+              <a:rPr lang="en-US" sz="2000" b="0" i="0" u="none" dirty="0">
                 <a:solidFill>
                   <a:srgbClr val="5E5E5E"/>
                 </a:solidFill>
@@ -36529,7 +36489,7 @@
               <a:t>When a repository is cloned, Git automatically creates </a:t>
             </a:r>
             <a:r>
-              <a:rPr lang="en-US" sz="2000" b="1" i="0" u="none">
+              <a:rPr lang="en-US" sz="2000" b="1" i="0" u="none" dirty="0">
                 <a:solidFill>
                   <a:srgbClr val="5E5E5E"/>
                 </a:solidFill>
@@ -36541,7 +36501,7 @@
               <a:t>remote-tracking branches </a:t>
             </a:r>
             <a:r>
-              <a:rPr lang="en-US" sz="2000" b="0" i="0" u="none">
+              <a:rPr lang="en-US" sz="2000" b="0" i="0" u="none" dirty="0">
                 <a:solidFill>
                   <a:srgbClr val="5E5E5E"/>
                 </a:solidFill>
@@ -36553,7 +36513,7 @@
               <a:t>(e.g., origin/master) for the remote branches and a </a:t>
             </a:r>
             <a:r>
-              <a:rPr lang="en-US" sz="2000" b="1" i="0" u="none">
+              <a:rPr lang="en-US" sz="2000" b="1" i="0" u="none" dirty="0">
                 <a:solidFill>
                   <a:srgbClr val="5E5E5E"/>
                 </a:solidFill>
@@ -36565,7 +36525,7 @@
               <a:t>tracking branch </a:t>
             </a:r>
             <a:r>
-              <a:rPr lang="en-US" sz="2000" b="0" i="0" u="none">
+              <a:rPr lang="en-US" sz="2000" b="0" i="0" u="none" dirty="0">
                 <a:solidFill>
                   <a:srgbClr val="5E5E5E"/>
                 </a:solidFill>
@@ -36577,7 +36537,7 @@
               <a:t>(e.g., master) to allow for local changes in relationship to the remote branch</a:t>
             </a:r>
             <a:br>
-              <a:rPr lang="en-US" sz="2000" b="0" i="0" u="none">
+              <a:rPr lang="en-US" sz="2000" b="0" i="0" u="none" dirty="0">
                 <a:solidFill>
                   <a:srgbClr val="5E5E5E"/>
                 </a:solidFill>
@@ -36588,7 +36548,7 @@
               </a:rPr>
             </a:br>
             <a:br>
-              <a:rPr lang="en-US" sz="2000" b="0" i="0" u="none">
+              <a:rPr lang="en-US" sz="2000" b="0" i="0" u="none" dirty="0">
                 <a:solidFill>
                   <a:srgbClr val="5E5E5E"/>
                 </a:solidFill>
@@ -36598,7 +36558,7 @@
                 <a:sym typeface="Arial"/>
               </a:rPr>
             </a:br>
-            <a:endParaRPr lang="en-US" sz="2000" b="0" i="0" u="none">
+            <a:endParaRPr lang="en-US" sz="2000" b="0" i="0" u="none" dirty="0">
               <a:solidFill>
                 <a:srgbClr val="5E5E5E"/>
               </a:solidFill>
@@ -37039,7 +36999,7 @@
               <a:buNone/>
             </a:pPr>
             <a:r>
-              <a:rPr lang="en-US" sz="3400" b="0" i="0" u="none" strike="noStrike" cap="none">
+              <a:rPr lang="en-US" sz="3400" b="0" i="0" u="none" strike="noStrike" cap="none" dirty="0">
                 <a:solidFill>
                   <a:schemeClr val="dk2"/>
                 </a:solidFill>
@@ -37051,7 +37011,7 @@
               <a:t>GIT </a:t>
             </a:r>
             <a:br>
-              <a:rPr lang="en-US" sz="3400" b="0" i="0" u="none" strike="noStrike" cap="none">
+              <a:rPr lang="en-US" sz="3400" b="0" i="0" u="none" strike="noStrike" cap="none" dirty="0">
                 <a:solidFill>
                   <a:schemeClr val="dk2"/>
                 </a:solidFill>
@@ -37062,7 +37022,7 @@
               </a:rPr>
             </a:br>
             <a:r>
-              <a:rPr lang="en-US"/>
+              <a:rPr lang="en-US" dirty="0"/>
               <a:t>Architecture</a:t>
             </a:r>
           </a:p>
@@ -37084,7 +37044,7 @@
               <a:buFont typeface="Arial"/>
               <a:buNone/>
             </a:pPr>
-            <a:endParaRPr/>
+            <a:endParaRPr dirty="0"/>
           </a:p>
           <a:p>
             <a:pPr marL="0" marR="0" lvl="0" indent="0" algn="l" rtl="0">
@@ -37105,7 +37065,7 @@
               <a:buNone/>
             </a:pPr>
             <a:r>
-              <a:rPr lang="en-US" sz="1800"/>
+              <a:rPr lang="en-US" sz="1800" dirty="0"/>
               <a:t>1 Local repo</a:t>
             </a:r>
           </a:p>
@@ -37128,7 +37088,7 @@
               <a:buNone/>
             </a:pPr>
             <a:r>
-              <a:rPr lang="en-US" sz="1800"/>
+              <a:rPr lang="en-US" sz="1800" dirty="0"/>
               <a:t>2 Remote (Origin)</a:t>
             </a:r>
           </a:p>
@@ -37151,14 +37111,14 @@
               <a:buNone/>
             </a:pPr>
             <a:r>
-              <a:rPr lang="en-US" sz="1800"/>
+              <a:rPr lang="en-US" sz="1800" dirty="0"/>
               <a:t>3 Common</a:t>
             </a:r>
             <a:br>
-              <a:rPr lang="en-US" sz="1800"/>
+              <a:rPr lang="en-US" sz="1800" dirty="0"/>
             </a:br>
             <a:r>
-              <a:rPr lang="en-US" sz="1800"/>
+              <a:rPr lang="en-US" sz="1800" dirty="0"/>
               <a:t>(Community) Remote Origin</a:t>
             </a:r>
           </a:p>
@@ -37372,7 +37332,7 @@
               <a:buNone/>
             </a:pPr>
             <a:r>
-              <a:rPr lang="en-US" sz="3600"/>
+              <a:rPr lang="en-US" sz="3600" dirty="0"/>
               <a:t>Demo</a:t>
             </a:r>
           </a:p>
@@ -37384,13 +37344,13 @@
               <a:buNone/>
             </a:pPr>
             <a:r>
-              <a:rPr lang="en-US" sz="3600"/>
+              <a:rPr lang="en-US" sz="3600" dirty="0"/>
               <a:t>Lab 1 - 2</a:t>
             </a:r>
             <a:br>
-              <a:rPr lang="en-US" sz="3600"/>
+              <a:rPr lang="en-US" sz="3600" dirty="0"/>
             </a:br>
-            <a:endParaRPr lang="en-US" sz="3600"/>
+            <a:endParaRPr lang="en-US" sz="3600" dirty="0"/>
           </a:p>
           <a:p>
             <a:pPr marL="457200" lvl="0" indent="-419100" rtl="0">
@@ -37400,7 +37360,7 @@
               <a:buSzPct val="100000"/>
             </a:pPr>
             <a:r>
-              <a:rPr lang="en-US" sz="3000"/>
+              <a:rPr lang="en-US" sz="3000" dirty="0"/>
               <a:t>We will configure your git user and e-mail</a:t>
             </a:r>
           </a:p>
@@ -37412,8 +37372,8 @@
               <a:buNone/>
             </a:pPr>
             <a:r>
-              <a:rPr lang="en-US" sz="3000"/>
-              <a:t>Will create remote, bare repository in home dir</a:t>
+              <a:rPr lang="en-US" sz="3000" dirty="0"/>
+              <a:t>Will create a remote, bare repository in the home directory</a:t>
             </a:r>
           </a:p>
           <a:p>
@@ -37424,8 +37384,8 @@
               <a:buNone/>
             </a:pPr>
             <a:r>
-              <a:rPr lang="en-US" sz="3000"/>
-              <a:t>Clone it to work repo1 in home dir also, add,commit and push</a:t>
+              <a:rPr lang="en-US" sz="3000" dirty="0"/>
+              <a:t>Clone it to work repository1 in the home directory also, add, commit, and push</a:t>
             </a:r>
           </a:p>
           <a:p>
@@ -37436,13 +37396,13 @@
               <a:buSzPct val="100000"/>
             </a:pPr>
             <a:r>
-              <a:rPr lang="en-US" sz="3000"/>
-              <a:t>Restructure files, add, commit and push</a:t>
+              <a:rPr lang="en-US" sz="3000" dirty="0"/>
+              <a:t>Restructure files, add, commit, and push</a:t>
             </a:r>
             <a:br>
-              <a:rPr lang="en-US" sz="3000"/>
+              <a:rPr lang="en-US" sz="3000" dirty="0"/>
             </a:br>
-            <a:endParaRPr lang="en-US" sz="3000"/>
+            <a:endParaRPr lang="en-US" sz="3000" dirty="0"/>
           </a:p>
         </p:txBody>
       </p:sp>
